--- a/figures/Figure2_case1.pptx
+++ b/figures/Figure2_case1.pptx
@@ -249,8 +249,11 @@
     </a:lvl9pPr>
   </p:defaultTextStyle>
   <p:extLst>
+    <p:ext uri="{EFAFB233-063F-42B5-8137-9DF3F51BA10A}">
+      <p15:sldGuideLst xmlns:p15="http://schemas.microsoft.com/office/powerpoint/2012/main"/>
+    </p:ext>
     <p:ext uri="GoogleSlidesCustomDataVersion2">
-      <go:slidesCustomData xmlns:go="http://customooxmlschemas.google.com/" xmlns:ahyp="http://schemas.microsoft.com/office/drawing/2018/hyperlinkcolor" xmlns:p15="http://schemas.microsoft.com/office/powerpoint/2012/main" xmlns:p14="http://schemas.microsoft.com/office/powerpoint/2010/main" xmlns:com="http://schemas.openxmlformats.org/drawingml/2006/compatibility" xmlns:pvml="urn:schemas-microsoft-com:office:powerpoint" xmlns:v="urn:schemas-microsoft-com:vml" xmlns:o="urn:schemas-microsoft-com:office:office" xmlns:dgm="http://schemas.openxmlformats.org/drawingml/2006/diagram" xmlns:c="http://schemas.openxmlformats.org/drawingml/2006/chart" xmlns:mv="urn:schemas-microsoft-com:mac:vml" xmlns:mc="http://schemas.openxmlformats.org/markup-compatibility/2006" xmlns="" r:id="rId8" roundtripDataSignature="AMtx7mgIxyl4bEzcNayDQ1Sc4BGs65vqzg=="/>
+      <go:slidesCustomData xmlns="" xmlns:mc="http://schemas.openxmlformats.org/markup-compatibility/2006" xmlns:mv="urn:schemas-microsoft-com:mac:vml" xmlns:c="http://schemas.openxmlformats.org/drawingml/2006/chart" xmlns:dgm="http://schemas.openxmlformats.org/drawingml/2006/diagram" xmlns:o="urn:schemas-microsoft-com:office:office" xmlns:v="urn:schemas-microsoft-com:vml" xmlns:pvml="urn:schemas-microsoft-com:office:powerpoint" xmlns:com="http://schemas.openxmlformats.org/drawingml/2006/compatibility" xmlns:p14="http://schemas.microsoft.com/office/powerpoint/2010/main" xmlns:p15="http://schemas.microsoft.com/office/powerpoint/2012/main" xmlns:ahyp="http://schemas.microsoft.com/office/drawing/2018/hyperlinkcolor" xmlns:go="http://customooxmlschemas.google.com/" r:id="rId8" roundtripDataSignature="AMtx7mgIxyl4bEzcNayDQ1Sc4BGs65vqzg=="/>
     </p:ext>
   </p:extLst>
 </p:presentation>
@@ -11993,7 +11996,7 @@
         </p:nvSpPr>
         <p:spPr>
           <a:xfrm>
-            <a:off x="5438823" y="4991967"/>
+            <a:off x="5585127" y="4991967"/>
             <a:ext cx="667265" cy="369332"/>
           </a:xfrm>
           <a:prstGeom prst="rect">
@@ -12121,36 +12124,6 @@
           </a:prstGeom>
         </p:spPr>
       </p:pic>
-      <p:pic>
-        <p:nvPicPr>
-          <p:cNvPr id="208" name="Picture 207">
-            <a:extLst>
-              <a:ext uri="{FF2B5EF4-FFF2-40B4-BE49-F238E27FC236}">
-                <a16:creationId xmlns:a16="http://schemas.microsoft.com/office/drawing/2014/main" id="{685CED16-FB0A-FD05-D756-241E85ABBB79}"/>
-              </a:ext>
-            </a:extLst>
-          </p:cNvPr>
-          <p:cNvPicPr>
-            <a:picLocks noChangeAspect="1"/>
-          </p:cNvPicPr>
-          <p:nvPr/>
-        </p:nvPicPr>
-        <p:blipFill>
-          <a:blip r:embed="rId6"/>
-          <a:stretch>
-            <a:fillRect/>
-          </a:stretch>
-        </p:blipFill>
-        <p:spPr>
-          <a:xfrm>
-            <a:off x="16858476" y="496812"/>
-            <a:ext cx="6262783" cy="4359039"/>
-          </a:xfrm>
-          <a:prstGeom prst="rect">
-            <a:avLst/>
-          </a:prstGeom>
-        </p:spPr>
-      </p:pic>
       <p:sp>
         <p:nvSpPr>
           <p:cNvPr id="210" name="Google Shape;99;p1">
@@ -12205,10 +12178,41 @@
       </p:sp>
       <p:pic>
         <p:nvPicPr>
-          <p:cNvPr id="211" name="Picture 210">
+          <p:cNvPr id="221" name="Picture 220">
             <a:extLst>
               <a:ext uri="{FF2B5EF4-FFF2-40B4-BE49-F238E27FC236}">
-                <a16:creationId xmlns:a16="http://schemas.microsoft.com/office/drawing/2014/main" id="{F6FFA1BD-3DDB-57A5-53A2-A8A239DEE397}"/>
+                <a16:creationId xmlns:a16="http://schemas.microsoft.com/office/drawing/2014/main" id="{46E43D71-B652-D83D-D673-B60F8A577D20}"/>
+              </a:ext>
+            </a:extLst>
+          </p:cNvPr>
+          <p:cNvPicPr>
+            <a:picLocks noChangeAspect="1"/>
+          </p:cNvPicPr>
+          <p:nvPr/>
+        </p:nvPicPr>
+        <p:blipFill>
+          <a:blip r:embed="rId6"/>
+          <a:srcRect l="2439"/>
+          <a:stretch>
+            <a:fillRect/>
+          </a:stretch>
+        </p:blipFill>
+        <p:spPr>
+          <a:xfrm>
+            <a:off x="-1" y="623635"/>
+            <a:ext cx="5598293" cy="9552492"/>
+          </a:xfrm>
+          <a:prstGeom prst="rect">
+            <a:avLst/>
+          </a:prstGeom>
+        </p:spPr>
+      </p:pic>
+      <p:pic>
+        <p:nvPicPr>
+          <p:cNvPr id="9" name="Picture 8">
+            <a:extLst>
+              <a:ext uri="{FF2B5EF4-FFF2-40B4-BE49-F238E27FC236}">
+                <a16:creationId xmlns:a16="http://schemas.microsoft.com/office/drawing/2014/main" id="{3E7890C6-34DD-F0FC-D3B0-F014713F57A7}"/>
               </a:ext>
             </a:extLst>
           </p:cNvPr>
@@ -12225,8 +12229,8 @@
         </p:blipFill>
         <p:spPr>
           <a:xfrm>
-            <a:off x="6106087" y="5176633"/>
-            <a:ext cx="7375445" cy="5301588"/>
+            <a:off x="16919740" y="245903"/>
+            <a:ext cx="6696475" cy="4660899"/>
           </a:xfrm>
           <a:prstGeom prst="rect">
             <a:avLst/>
@@ -12235,10 +12239,10 @@
       </p:pic>
       <p:pic>
         <p:nvPicPr>
-          <p:cNvPr id="217" name="Picture 216">
+          <p:cNvPr id="11" name="Picture 10">
             <a:extLst>
               <a:ext uri="{FF2B5EF4-FFF2-40B4-BE49-F238E27FC236}">
-                <a16:creationId xmlns:a16="http://schemas.microsoft.com/office/drawing/2014/main" id="{852A2F9E-B310-2A87-DFE1-842AA198E3D1}"/>
+                <a16:creationId xmlns:a16="http://schemas.microsoft.com/office/drawing/2014/main" id="{180715E3-DAE4-7427-21F5-1C8D02A7AED4}"/>
               </a:ext>
             </a:extLst>
           </p:cNvPr>
@@ -12255,8 +12259,8 @@
         </p:blipFill>
         <p:spPr>
           <a:xfrm>
-            <a:off x="14171344" y="5085864"/>
-            <a:ext cx="7579165" cy="5301588"/>
+            <a:off x="6308193" y="5176632"/>
+            <a:ext cx="6511550" cy="4660899"/>
           </a:xfrm>
           <a:prstGeom prst="rect">
             <a:avLst/>
@@ -12265,10 +12269,10 @@
       </p:pic>
       <p:pic>
         <p:nvPicPr>
-          <p:cNvPr id="221" name="Picture 220">
+          <p:cNvPr id="13" name="Picture 12">
             <a:extLst>
               <a:ext uri="{FF2B5EF4-FFF2-40B4-BE49-F238E27FC236}">
-                <a16:creationId xmlns:a16="http://schemas.microsoft.com/office/drawing/2014/main" id="{46E43D71-B652-D83D-D673-B60F8A577D20}"/>
+                <a16:creationId xmlns:a16="http://schemas.microsoft.com/office/drawing/2014/main" id="{2BC63EA0-8015-9BCC-71EB-4F5C09C65678}"/>
               </a:ext>
             </a:extLst>
           </p:cNvPr>
@@ -12279,15 +12283,14 @@
         </p:nvPicPr>
         <p:blipFill>
           <a:blip r:embed="rId9"/>
-          <a:srcRect l="2439"/>
           <a:stretch>
             <a:fillRect/>
           </a:stretch>
         </p:blipFill>
         <p:spPr>
           <a:xfrm>
-            <a:off x="-1" y="623635"/>
-            <a:ext cx="5598293" cy="9552492"/>
+            <a:off x="14598522" y="5176632"/>
+            <a:ext cx="6663233" cy="4660898"/>
           </a:xfrm>
           <a:prstGeom prst="rect">
             <a:avLst/>

--- a/figures/Figure2_case1.pptx
+++ b/figures/Figure2_case1.pptx
@@ -253,7 +253,7 @@
       <p15:sldGuideLst xmlns:p15="http://schemas.microsoft.com/office/powerpoint/2012/main"/>
     </p:ext>
     <p:ext uri="GoogleSlidesCustomDataVersion2">
-      <go:slidesCustomData xmlns="" xmlns:mc="http://schemas.openxmlformats.org/markup-compatibility/2006" xmlns:mv="urn:schemas-microsoft-com:mac:vml" xmlns:c="http://schemas.openxmlformats.org/drawingml/2006/chart" xmlns:dgm="http://schemas.openxmlformats.org/drawingml/2006/diagram" xmlns:o="urn:schemas-microsoft-com:office:office" xmlns:v="urn:schemas-microsoft-com:vml" xmlns:pvml="urn:schemas-microsoft-com:office:powerpoint" xmlns:com="http://schemas.openxmlformats.org/drawingml/2006/compatibility" xmlns:p14="http://schemas.microsoft.com/office/powerpoint/2010/main" xmlns:p15="http://schemas.microsoft.com/office/powerpoint/2012/main" xmlns:ahyp="http://schemas.microsoft.com/office/drawing/2018/hyperlinkcolor" xmlns:go="http://customooxmlschemas.google.com/" r:id="rId8" roundtripDataSignature="AMtx7mgIxyl4bEzcNayDQ1Sc4BGs65vqzg=="/>
+      <go:slidesCustomData xmlns:go="http://customooxmlschemas.google.com/" xmlns:ahyp="http://schemas.microsoft.com/office/drawing/2018/hyperlinkcolor" xmlns:p15="http://schemas.microsoft.com/office/powerpoint/2012/main" xmlns:p14="http://schemas.microsoft.com/office/powerpoint/2010/main" xmlns:com="http://schemas.openxmlformats.org/drawingml/2006/compatibility" xmlns:pvml="urn:schemas-microsoft-com:office:powerpoint" xmlns:v="urn:schemas-microsoft-com:vml" xmlns:o="urn:schemas-microsoft-com:office:office" xmlns:dgm="http://schemas.openxmlformats.org/drawingml/2006/diagram" xmlns:c="http://schemas.openxmlformats.org/drawingml/2006/chart" xmlns:mv="urn:schemas-microsoft-com:mac:vml" xmlns:mc="http://schemas.openxmlformats.org/markup-compatibility/2006" xmlns="" r:id="rId8" roundtripDataSignature="AMtx7mgIxyl4bEzcNayDQ1Sc4BGs65vqzg=="/>
     </p:ext>
   </p:extLst>
 </p:presentation>
@@ -11996,7 +11996,7 @@
         </p:nvSpPr>
         <p:spPr>
           <a:xfrm>
-            <a:off x="5585127" y="4991967"/>
+            <a:off x="5585127" y="5284575"/>
             <a:ext cx="667265" cy="369332"/>
           </a:xfrm>
           <a:prstGeom prst="rect">
@@ -12124,58 +12124,6 @@
           </a:prstGeom>
         </p:spPr>
       </p:pic>
-      <p:sp>
-        <p:nvSpPr>
-          <p:cNvPr id="210" name="Google Shape;99;p1">
-            <a:extLst>
-              <a:ext uri="{FF2B5EF4-FFF2-40B4-BE49-F238E27FC236}">
-                <a16:creationId xmlns:a16="http://schemas.microsoft.com/office/drawing/2014/main" id="{E7A6191E-6CC9-9BE5-90F0-7FF4DB5C9A40}"/>
-              </a:ext>
-            </a:extLst>
-          </p:cNvPr>
-          <p:cNvSpPr txBox="1"/>
-          <p:nvPr/>
-        </p:nvSpPr>
-        <p:spPr>
-          <a:xfrm>
-            <a:off x="13704695" y="5085864"/>
-            <a:ext cx="667265" cy="369291"/>
-          </a:xfrm>
-          <a:prstGeom prst="rect">
-            <a:avLst/>
-          </a:prstGeom>
-          <a:noFill/>
-          <a:ln>
-            <a:noFill/>
-          </a:ln>
-        </p:spPr>
-        <p:txBody>
-          <a:bodyPr spcFirstLastPara="1" wrap="square" lIns="91425" tIns="45700" rIns="91425" bIns="45700" anchor="t" anchorCtr="0">
-            <a:spAutoFit/>
-          </a:bodyPr>
-          <a:lstStyle/>
-          <a:p>
-            <a:pPr marL="0" marR="0" lvl="0" indent="0" algn="l" rtl="0">
-              <a:spcBef>
-                <a:spcPts val="0"/>
-              </a:spcBef>
-              <a:spcAft>
-                <a:spcPts val="0"/>
-              </a:spcAft>
-              <a:buNone/>
-            </a:pPr>
-            <a:r>
-              <a:rPr lang="en-US" sz="1800" dirty="0">
-                <a:solidFill>
-                  <a:schemeClr val="dk1"/>
-                </a:solidFill>
-              </a:rPr>
-              <a:t>f</a:t>
-            </a:r>
-            <a:endParaRPr dirty="0"/>
-          </a:p>
-        </p:txBody>
-      </p:sp>
       <p:pic>
         <p:nvPicPr>
           <p:cNvPr id="221" name="Picture 220">
@@ -12199,7 +12147,7 @@
         </p:blipFill>
         <p:spPr>
           <a:xfrm>
-            <a:off x="-1" y="623635"/>
+            <a:off x="18287" y="623635"/>
             <a:ext cx="5598293" cy="9552492"/>
           </a:xfrm>
           <a:prstGeom prst="rect">
@@ -12229,8 +12177,8 @@
         </p:blipFill>
         <p:spPr>
           <a:xfrm>
-            <a:off x="16919740" y="245903"/>
-            <a:ext cx="6696475" cy="4660899"/>
+            <a:off x="16791724" y="528414"/>
+            <a:ext cx="5795053" cy="4033489"/>
           </a:xfrm>
           <a:prstGeom prst="rect">
             <a:avLst/>
@@ -12239,10 +12187,10 @@
       </p:pic>
       <p:pic>
         <p:nvPicPr>
-          <p:cNvPr id="11" name="Picture 10">
+          <p:cNvPr id="7" name="Picture 6">
             <a:extLst>
               <a:ext uri="{FF2B5EF4-FFF2-40B4-BE49-F238E27FC236}">
-                <a16:creationId xmlns:a16="http://schemas.microsoft.com/office/drawing/2014/main" id="{180715E3-DAE4-7427-21F5-1C8D02A7AED4}"/>
+                <a16:creationId xmlns:a16="http://schemas.microsoft.com/office/drawing/2014/main" id="{6DF54CDE-D16C-D070-E91A-BEE41B247746}"/>
               </a:ext>
             </a:extLst>
           </p:cNvPr>
@@ -12259,20 +12207,72 @@
         </p:blipFill>
         <p:spPr>
           <a:xfrm>
-            <a:off x="6308193" y="5176632"/>
-            <a:ext cx="6511550" cy="4660899"/>
+            <a:off x="10679393" y="4973249"/>
+            <a:ext cx="3212199" cy="2017217"/>
           </a:xfrm>
           <a:prstGeom prst="rect">
             <a:avLst/>
           </a:prstGeom>
         </p:spPr>
       </p:pic>
+      <p:sp>
+        <p:nvSpPr>
+          <p:cNvPr id="19" name="Google Shape;99;p1">
+            <a:extLst>
+              <a:ext uri="{FF2B5EF4-FFF2-40B4-BE49-F238E27FC236}">
+                <a16:creationId xmlns:a16="http://schemas.microsoft.com/office/drawing/2014/main" id="{C3947DFD-D14B-76E8-D7AB-11A77AD67DA7}"/>
+              </a:ext>
+            </a:extLst>
+          </p:cNvPr>
+          <p:cNvSpPr txBox="1"/>
+          <p:nvPr/>
+        </p:nvSpPr>
+        <p:spPr>
+          <a:xfrm>
+            <a:off x="9983268" y="5191389"/>
+            <a:ext cx="667265" cy="369291"/>
+          </a:xfrm>
+          <a:prstGeom prst="rect">
+            <a:avLst/>
+          </a:prstGeom>
+          <a:noFill/>
+          <a:ln>
+            <a:noFill/>
+          </a:ln>
+        </p:spPr>
+        <p:txBody>
+          <a:bodyPr spcFirstLastPara="1" wrap="square" lIns="91425" tIns="45700" rIns="91425" bIns="45700" anchor="t" anchorCtr="0">
+            <a:spAutoFit/>
+          </a:bodyPr>
+          <a:lstStyle/>
+          <a:p>
+            <a:pPr marL="0" marR="0" lvl="0" indent="0" algn="l" rtl="0">
+              <a:spcBef>
+                <a:spcPts val="0"/>
+              </a:spcBef>
+              <a:spcAft>
+                <a:spcPts val="0"/>
+              </a:spcAft>
+              <a:buNone/>
+            </a:pPr>
+            <a:r>
+              <a:rPr lang="en-US" sz="1800" dirty="0">
+                <a:solidFill>
+                  <a:schemeClr val="dk1"/>
+                </a:solidFill>
+              </a:rPr>
+              <a:t>f</a:t>
+            </a:r>
+            <a:endParaRPr dirty="0"/>
+          </a:p>
+        </p:txBody>
+      </p:sp>
       <p:pic>
         <p:nvPicPr>
-          <p:cNvPr id="13" name="Picture 12">
+          <p:cNvPr id="21" name="Picture 20">
             <a:extLst>
               <a:ext uri="{FF2B5EF4-FFF2-40B4-BE49-F238E27FC236}">
-                <a16:creationId xmlns:a16="http://schemas.microsoft.com/office/drawing/2014/main" id="{2BC63EA0-8015-9BCC-71EB-4F5C09C65678}"/>
+                <a16:creationId xmlns:a16="http://schemas.microsoft.com/office/drawing/2014/main" id="{4B13D539-4D7E-05E2-E210-EE8F66FE14E9}"/>
               </a:ext>
             </a:extLst>
           </p:cNvPr>
@@ -12289,14 +12289,127 @@
         </p:blipFill>
         <p:spPr>
           <a:xfrm>
-            <a:off x="14598522" y="5176632"/>
-            <a:ext cx="6663233" cy="4660898"/>
+            <a:off x="5887923" y="5084575"/>
+            <a:ext cx="3487483" cy="5508799"/>
           </a:xfrm>
           <a:prstGeom prst="rect">
             <a:avLst/>
           </a:prstGeom>
         </p:spPr>
       </p:pic>
+      <p:pic>
+        <p:nvPicPr>
+          <p:cNvPr id="27" name="Picture 26">
+            <a:extLst>
+              <a:ext uri="{FF2B5EF4-FFF2-40B4-BE49-F238E27FC236}">
+                <a16:creationId xmlns:a16="http://schemas.microsoft.com/office/drawing/2014/main" id="{E7D66B22-1BE9-EAD9-703D-AF136E614AB5}"/>
+              </a:ext>
+            </a:extLst>
+          </p:cNvPr>
+          <p:cNvPicPr>
+            <a:picLocks noChangeAspect="1"/>
+          </p:cNvPicPr>
+          <p:nvPr/>
+        </p:nvPicPr>
+        <p:blipFill>
+          <a:blip r:embed="rId10"/>
+          <a:srcRect l="8571" r="6260" b="17770"/>
+          <a:stretch>
+            <a:fillRect/>
+          </a:stretch>
+        </p:blipFill>
+        <p:spPr>
+          <a:xfrm>
+            <a:off x="10012509" y="7101792"/>
+            <a:ext cx="4672756" cy="3602908"/>
+          </a:xfrm>
+          <a:prstGeom prst="rect">
+            <a:avLst/>
+          </a:prstGeom>
+        </p:spPr>
+      </p:pic>
+      <p:pic>
+        <p:nvPicPr>
+          <p:cNvPr id="29" name="Picture 28">
+            <a:extLst>
+              <a:ext uri="{FF2B5EF4-FFF2-40B4-BE49-F238E27FC236}">
+                <a16:creationId xmlns:a16="http://schemas.microsoft.com/office/drawing/2014/main" id="{A9E68AA6-9F4C-4AB3-E6A6-A7FAFC446A61}"/>
+              </a:ext>
+            </a:extLst>
+          </p:cNvPr>
+          <p:cNvPicPr>
+            <a:picLocks noChangeAspect="1"/>
+          </p:cNvPicPr>
+          <p:nvPr/>
+        </p:nvPicPr>
+        <p:blipFill>
+          <a:blip r:embed="rId11"/>
+          <a:stretch>
+            <a:fillRect/>
+          </a:stretch>
+        </p:blipFill>
+        <p:spPr>
+          <a:xfrm>
+            <a:off x="15434363" y="5376034"/>
+            <a:ext cx="6808775" cy="5106581"/>
+          </a:xfrm>
+          <a:prstGeom prst="rect">
+            <a:avLst/>
+          </a:prstGeom>
+        </p:spPr>
+      </p:pic>
+      <p:sp>
+        <p:nvSpPr>
+          <p:cNvPr id="210" name="Google Shape;99;p1">
+            <a:extLst>
+              <a:ext uri="{FF2B5EF4-FFF2-40B4-BE49-F238E27FC236}">
+                <a16:creationId xmlns:a16="http://schemas.microsoft.com/office/drawing/2014/main" id="{E7A6191E-6CC9-9BE5-90F0-7FF4DB5C9A40}"/>
+              </a:ext>
+            </a:extLst>
+          </p:cNvPr>
+          <p:cNvSpPr txBox="1"/>
+          <p:nvPr/>
+        </p:nvSpPr>
+        <p:spPr>
+          <a:xfrm>
+            <a:off x="15429915" y="5192517"/>
+            <a:ext cx="667265" cy="369291"/>
+          </a:xfrm>
+          <a:prstGeom prst="rect">
+            <a:avLst/>
+          </a:prstGeom>
+          <a:noFill/>
+          <a:ln>
+            <a:noFill/>
+          </a:ln>
+        </p:spPr>
+        <p:txBody>
+          <a:bodyPr spcFirstLastPara="1" wrap="square" lIns="91425" tIns="45700" rIns="91425" bIns="45700" anchor="t" anchorCtr="0">
+            <a:spAutoFit/>
+          </a:bodyPr>
+          <a:lstStyle/>
+          <a:p>
+            <a:pPr marL="0" marR="0" lvl="0" indent="0" algn="l" rtl="0">
+              <a:spcBef>
+                <a:spcPts val="0"/>
+              </a:spcBef>
+              <a:spcAft>
+                <a:spcPts val="0"/>
+              </a:spcAft>
+              <a:buNone/>
+            </a:pPr>
+            <a:r>
+              <a:rPr lang="en-US" sz="1800" dirty="0">
+                <a:solidFill>
+                  <a:schemeClr val="dk1"/>
+                </a:solidFill>
+              </a:rPr>
+              <a:t>g</a:t>
+            </a:r>
+            <a:endParaRPr dirty="0"/>
+          </a:p>
+        </p:txBody>
+      </p:sp>
     </p:spTree>
   </p:cSld>
   <p:clrMapOvr>

--- a/figures/Figure2_case1.pptx
+++ b/figures/Figure2_case1.pptx
@@ -253,7 +253,7 @@
       <p15:sldGuideLst xmlns:p15="http://schemas.microsoft.com/office/powerpoint/2012/main"/>
     </p:ext>
     <p:ext uri="GoogleSlidesCustomDataVersion2">
-      <go:slidesCustomData xmlns:go="http://customooxmlschemas.google.com/" xmlns:ahyp="http://schemas.microsoft.com/office/drawing/2018/hyperlinkcolor" xmlns:p15="http://schemas.microsoft.com/office/powerpoint/2012/main" xmlns:p14="http://schemas.microsoft.com/office/powerpoint/2010/main" xmlns:com="http://schemas.openxmlformats.org/drawingml/2006/compatibility" xmlns:pvml="urn:schemas-microsoft-com:office:powerpoint" xmlns:v="urn:schemas-microsoft-com:vml" xmlns:o="urn:schemas-microsoft-com:office:office" xmlns:dgm="http://schemas.openxmlformats.org/drawingml/2006/diagram" xmlns:c="http://schemas.openxmlformats.org/drawingml/2006/chart" xmlns:mv="urn:schemas-microsoft-com:mac:vml" xmlns:mc="http://schemas.openxmlformats.org/markup-compatibility/2006" xmlns="" r:id="rId8" roundtripDataSignature="AMtx7mgIxyl4bEzcNayDQ1Sc4BGs65vqzg=="/>
+      <go:slidesCustomData xmlns="" xmlns:mc="http://schemas.openxmlformats.org/markup-compatibility/2006" xmlns:mv="urn:schemas-microsoft-com:mac:vml" xmlns:c="http://schemas.openxmlformats.org/drawingml/2006/chart" xmlns:dgm="http://schemas.openxmlformats.org/drawingml/2006/diagram" xmlns:o="urn:schemas-microsoft-com:office:office" xmlns:v="urn:schemas-microsoft-com:vml" xmlns:pvml="urn:schemas-microsoft-com:office:powerpoint" xmlns:com="http://schemas.openxmlformats.org/drawingml/2006/compatibility" xmlns:p14="http://schemas.microsoft.com/office/powerpoint/2010/main" xmlns:p15="http://schemas.microsoft.com/office/powerpoint/2012/main" xmlns:ahyp="http://schemas.microsoft.com/office/drawing/2018/hyperlinkcolor" xmlns:go="http://customooxmlschemas.google.com/" r:id="rId8" roundtripDataSignature="AMtx7mgIxyl4bEzcNayDQ1Sc4BGs65vqzg=="/>
     </p:ext>
   </p:extLst>
 </p:presentation>
@@ -12155,66 +12155,6 @@
           </a:prstGeom>
         </p:spPr>
       </p:pic>
-      <p:pic>
-        <p:nvPicPr>
-          <p:cNvPr id="9" name="Picture 8">
-            <a:extLst>
-              <a:ext uri="{FF2B5EF4-FFF2-40B4-BE49-F238E27FC236}">
-                <a16:creationId xmlns:a16="http://schemas.microsoft.com/office/drawing/2014/main" id="{3E7890C6-34DD-F0FC-D3B0-F014713F57A7}"/>
-              </a:ext>
-            </a:extLst>
-          </p:cNvPr>
-          <p:cNvPicPr>
-            <a:picLocks noChangeAspect="1"/>
-          </p:cNvPicPr>
-          <p:nvPr/>
-        </p:nvPicPr>
-        <p:blipFill>
-          <a:blip r:embed="rId7"/>
-          <a:stretch>
-            <a:fillRect/>
-          </a:stretch>
-        </p:blipFill>
-        <p:spPr>
-          <a:xfrm>
-            <a:off x="16791724" y="528414"/>
-            <a:ext cx="5795053" cy="4033489"/>
-          </a:xfrm>
-          <a:prstGeom prst="rect">
-            <a:avLst/>
-          </a:prstGeom>
-        </p:spPr>
-      </p:pic>
-      <p:pic>
-        <p:nvPicPr>
-          <p:cNvPr id="7" name="Picture 6">
-            <a:extLst>
-              <a:ext uri="{FF2B5EF4-FFF2-40B4-BE49-F238E27FC236}">
-                <a16:creationId xmlns:a16="http://schemas.microsoft.com/office/drawing/2014/main" id="{6DF54CDE-D16C-D070-E91A-BEE41B247746}"/>
-              </a:ext>
-            </a:extLst>
-          </p:cNvPr>
-          <p:cNvPicPr>
-            <a:picLocks noChangeAspect="1"/>
-          </p:cNvPicPr>
-          <p:nvPr/>
-        </p:nvPicPr>
-        <p:blipFill>
-          <a:blip r:embed="rId8"/>
-          <a:stretch>
-            <a:fillRect/>
-          </a:stretch>
-        </p:blipFill>
-        <p:spPr>
-          <a:xfrm>
-            <a:off x="10679393" y="4973249"/>
-            <a:ext cx="3212199" cy="2017217"/>
-          </a:xfrm>
-          <a:prstGeom prst="rect">
-            <a:avLst/>
-          </a:prstGeom>
-        </p:spPr>
-      </p:pic>
       <p:sp>
         <p:nvSpPr>
           <p:cNvPr id="19" name="Google Shape;99;p1">
@@ -12282,7 +12222,7 @@
           <p:nvPr/>
         </p:nvPicPr>
         <p:blipFill>
-          <a:blip r:embed="rId9"/>
+          <a:blip r:embed="rId7"/>
           <a:stretch>
             <a:fillRect/>
           </a:stretch>
@@ -12291,37 +12231,6 @@
           <a:xfrm>
             <a:off x="5887923" y="5084575"/>
             <a:ext cx="3487483" cy="5508799"/>
-          </a:xfrm>
-          <a:prstGeom prst="rect">
-            <a:avLst/>
-          </a:prstGeom>
-        </p:spPr>
-      </p:pic>
-      <p:pic>
-        <p:nvPicPr>
-          <p:cNvPr id="27" name="Picture 26">
-            <a:extLst>
-              <a:ext uri="{FF2B5EF4-FFF2-40B4-BE49-F238E27FC236}">
-                <a16:creationId xmlns:a16="http://schemas.microsoft.com/office/drawing/2014/main" id="{E7D66B22-1BE9-EAD9-703D-AF136E614AB5}"/>
-              </a:ext>
-            </a:extLst>
-          </p:cNvPr>
-          <p:cNvPicPr>
-            <a:picLocks noChangeAspect="1"/>
-          </p:cNvPicPr>
-          <p:nvPr/>
-        </p:nvPicPr>
-        <p:blipFill>
-          <a:blip r:embed="rId10"/>
-          <a:srcRect l="8571" r="6260" b="17770"/>
-          <a:stretch>
-            <a:fillRect/>
-          </a:stretch>
-        </p:blipFill>
-        <p:spPr>
-          <a:xfrm>
-            <a:off x="10012509" y="7101792"/>
-            <a:ext cx="4672756" cy="3602908"/>
           </a:xfrm>
           <a:prstGeom prst="rect">
             <a:avLst/>
@@ -12343,7 +12252,7 @@
           <p:nvPr/>
         </p:nvPicPr>
         <p:blipFill>
-          <a:blip r:embed="rId11"/>
+          <a:blip r:embed="rId8"/>
           <a:stretch>
             <a:fillRect/>
           </a:stretch>
@@ -12410,6 +12319,97 @@
           </a:p>
         </p:txBody>
       </p:sp>
+      <p:pic>
+        <p:nvPicPr>
+          <p:cNvPr id="3" name="Picture 2">
+            <a:extLst>
+              <a:ext uri="{FF2B5EF4-FFF2-40B4-BE49-F238E27FC236}">
+                <a16:creationId xmlns:a16="http://schemas.microsoft.com/office/drawing/2014/main" id="{81A47AB0-0076-D55A-5ACA-FF469AB5DAAE}"/>
+              </a:ext>
+            </a:extLst>
+          </p:cNvPr>
+          <p:cNvPicPr>
+            <a:picLocks noChangeAspect="1"/>
+          </p:cNvPicPr>
+          <p:nvPr/>
+        </p:nvPicPr>
+        <p:blipFill>
+          <a:blip r:embed="rId9"/>
+          <a:stretch>
+            <a:fillRect/>
+          </a:stretch>
+        </p:blipFill>
+        <p:spPr>
+          <a:xfrm>
+            <a:off x="16603550" y="312348"/>
+            <a:ext cx="6081768" cy="4233049"/>
+          </a:xfrm>
+          <a:prstGeom prst="rect">
+            <a:avLst/>
+          </a:prstGeom>
+        </p:spPr>
+      </p:pic>
+      <p:pic>
+        <p:nvPicPr>
+          <p:cNvPr id="5" name="Picture 4">
+            <a:extLst>
+              <a:ext uri="{FF2B5EF4-FFF2-40B4-BE49-F238E27FC236}">
+                <a16:creationId xmlns:a16="http://schemas.microsoft.com/office/drawing/2014/main" id="{A929F67E-90AC-1C50-C317-E98D54BB47B7}"/>
+              </a:ext>
+            </a:extLst>
+          </p:cNvPr>
+          <p:cNvPicPr>
+            <a:picLocks noChangeAspect="1"/>
+          </p:cNvPicPr>
+          <p:nvPr/>
+        </p:nvPicPr>
+        <p:blipFill>
+          <a:blip r:embed="rId10"/>
+          <a:stretch>
+            <a:fillRect/>
+          </a:stretch>
+        </p:blipFill>
+        <p:spPr>
+          <a:xfrm>
+            <a:off x="10578847" y="4830348"/>
+            <a:ext cx="3565836" cy="2227126"/>
+          </a:xfrm>
+          <a:prstGeom prst="rect">
+            <a:avLst/>
+          </a:prstGeom>
+        </p:spPr>
+      </p:pic>
+      <p:pic>
+        <p:nvPicPr>
+          <p:cNvPr id="11" name="Picture 10">
+            <a:extLst>
+              <a:ext uri="{FF2B5EF4-FFF2-40B4-BE49-F238E27FC236}">
+                <a16:creationId xmlns:a16="http://schemas.microsoft.com/office/drawing/2014/main" id="{C15F1B63-0EBE-6350-B423-EED055010C67}"/>
+              </a:ext>
+            </a:extLst>
+          </p:cNvPr>
+          <p:cNvPicPr>
+            <a:picLocks noChangeAspect="1"/>
+          </p:cNvPicPr>
+          <p:nvPr/>
+        </p:nvPicPr>
+        <p:blipFill>
+          <a:blip r:embed="rId11"/>
+          <a:srcRect b="19547"/>
+          <a:stretch>
+            <a:fillRect/>
+          </a:stretch>
+        </p:blipFill>
+        <p:spPr>
+          <a:xfrm>
+            <a:off x="9600277" y="7201583"/>
+            <a:ext cx="5486400" cy="3525028"/>
+          </a:xfrm>
+          <a:prstGeom prst="rect">
+            <a:avLst/>
+          </a:prstGeom>
+        </p:spPr>
+      </p:pic>
     </p:spTree>
   </p:cSld>
   <p:clrMapOvr>

--- a/figures/Figure2_case1.pptx
+++ b/figures/Figure2_case1.pptx
@@ -10,7 +10,7 @@
   <p:sldIdLst>
     <p:sldId id="256" r:id="rId2"/>
   </p:sldIdLst>
-  <p:sldSz cx="23399750" cy="10799763"/>
+  <p:sldSz cx="6858000" cy="9144000" type="letter"/>
   <p:notesSz cx="6858000" cy="9144000"/>
   <p:embeddedFontLst>
     <p:embeddedFont>
@@ -45,7 +45,7 @@
         <a:srgbClr val="000000"/>
       </a:buClr>
       <a:buFont typeface="Arial"/>
-      <a:defRPr sz="1400" b="0" i="0" u="none" strike="noStrike" cap="none">
+      <a:defRPr sz="655" b="0" i="0" u="none" strike="noStrike" cap="none">
         <a:solidFill>
           <a:srgbClr val="000000"/>
         </a:solidFill>
@@ -69,7 +69,7 @@
         <a:srgbClr val="000000"/>
       </a:buClr>
       <a:buFont typeface="Arial"/>
-      <a:defRPr sz="1400" b="0" i="0" u="none" strike="noStrike" cap="none">
+      <a:defRPr sz="655" b="0" i="0" u="none" strike="noStrike" cap="none">
         <a:solidFill>
           <a:srgbClr val="000000"/>
         </a:solidFill>
@@ -93,7 +93,7 @@
         <a:srgbClr val="000000"/>
       </a:buClr>
       <a:buFont typeface="Arial"/>
-      <a:defRPr sz="1400" b="0" i="0" u="none" strike="noStrike" cap="none">
+      <a:defRPr sz="655" b="0" i="0" u="none" strike="noStrike" cap="none">
         <a:solidFill>
           <a:srgbClr val="000000"/>
         </a:solidFill>
@@ -117,7 +117,7 @@
         <a:srgbClr val="000000"/>
       </a:buClr>
       <a:buFont typeface="Arial"/>
-      <a:defRPr sz="1400" b="0" i="0" u="none" strike="noStrike" cap="none">
+      <a:defRPr sz="655" b="0" i="0" u="none" strike="noStrike" cap="none">
         <a:solidFill>
           <a:srgbClr val="000000"/>
         </a:solidFill>
@@ -141,7 +141,7 @@
         <a:srgbClr val="000000"/>
       </a:buClr>
       <a:buFont typeface="Arial"/>
-      <a:defRPr sz="1400" b="0" i="0" u="none" strike="noStrike" cap="none">
+      <a:defRPr sz="655" b="0" i="0" u="none" strike="noStrike" cap="none">
         <a:solidFill>
           <a:srgbClr val="000000"/>
         </a:solidFill>
@@ -165,7 +165,7 @@
         <a:srgbClr val="000000"/>
       </a:buClr>
       <a:buFont typeface="Arial"/>
-      <a:defRPr sz="1400" b="0" i="0" u="none" strike="noStrike" cap="none">
+      <a:defRPr sz="655" b="0" i="0" u="none" strike="noStrike" cap="none">
         <a:solidFill>
           <a:srgbClr val="000000"/>
         </a:solidFill>
@@ -189,7 +189,7 @@
         <a:srgbClr val="000000"/>
       </a:buClr>
       <a:buFont typeface="Arial"/>
-      <a:defRPr sz="1400" b="0" i="0" u="none" strike="noStrike" cap="none">
+      <a:defRPr sz="655" b="0" i="0" u="none" strike="noStrike" cap="none">
         <a:solidFill>
           <a:srgbClr val="000000"/>
         </a:solidFill>
@@ -213,7 +213,7 @@
         <a:srgbClr val="000000"/>
       </a:buClr>
       <a:buFont typeface="Arial"/>
-      <a:defRPr sz="1400" b="0" i="0" u="none" strike="noStrike" cap="none">
+      <a:defRPr sz="655" b="0" i="0" u="none" strike="noStrike" cap="none">
         <a:solidFill>
           <a:srgbClr val="000000"/>
         </a:solidFill>
@@ -237,7 +237,7 @@
         <a:srgbClr val="000000"/>
       </a:buClr>
       <a:buFont typeface="Arial"/>
-      <a:defRPr sz="1400" b="0" i="0" u="none" strike="noStrike" cap="none">
+      <a:defRPr sz="655" b="0" i="0" u="none" strike="noStrike" cap="none">
         <a:solidFill>
           <a:srgbClr val="000000"/>
         </a:solidFill>
@@ -253,7 +253,7 @@
       <p15:sldGuideLst xmlns:p15="http://schemas.microsoft.com/office/powerpoint/2012/main"/>
     </p:ext>
     <p:ext uri="GoogleSlidesCustomDataVersion2">
-      <go:slidesCustomData xmlns="" xmlns:mc="http://schemas.openxmlformats.org/markup-compatibility/2006" xmlns:mv="urn:schemas-microsoft-com:mac:vml" xmlns:c="http://schemas.openxmlformats.org/drawingml/2006/chart" xmlns:dgm="http://schemas.openxmlformats.org/drawingml/2006/diagram" xmlns:o="urn:schemas-microsoft-com:office:office" xmlns:v="urn:schemas-microsoft-com:vml" xmlns:pvml="urn:schemas-microsoft-com:office:powerpoint" xmlns:com="http://schemas.openxmlformats.org/drawingml/2006/compatibility" xmlns:p14="http://schemas.microsoft.com/office/powerpoint/2010/main" xmlns:p15="http://schemas.microsoft.com/office/powerpoint/2012/main" xmlns:ahyp="http://schemas.microsoft.com/office/drawing/2018/hyperlinkcolor" xmlns:go="http://customooxmlschemas.google.com/" r:id="rId8" roundtripDataSignature="AMtx7mgIxyl4bEzcNayDQ1Sc4BGs65vqzg=="/>
+      <go:slidesCustomData xmlns:go="http://customooxmlschemas.google.com/" xmlns:ahyp="http://schemas.microsoft.com/office/drawing/2018/hyperlinkcolor" xmlns:p15="http://schemas.microsoft.com/office/powerpoint/2012/main" xmlns:p14="http://schemas.microsoft.com/office/powerpoint/2010/main" xmlns:com="http://schemas.openxmlformats.org/drawingml/2006/compatibility" xmlns:pvml="urn:schemas-microsoft-com:office:powerpoint" xmlns:v="urn:schemas-microsoft-com:vml" xmlns:o="urn:schemas-microsoft-com:office:office" xmlns:dgm="http://schemas.openxmlformats.org/drawingml/2006/diagram" xmlns:c="http://schemas.openxmlformats.org/drawingml/2006/chart" xmlns:mv="urn:schemas-microsoft-com:mac:vml" xmlns:mc="http://schemas.openxmlformats.org/markup-compatibility/2006" xmlns="" r:id="rId8" roundtripDataSignature="AMtx7mgIxyl4bEzcNayDQ1Sc4BGs65vqzg=="/>
     </p:ext>
   </p:extLst>
 </p:presentation>
@@ -706,8 +706,8 @@
         </p:nvSpPr>
         <p:spPr>
           <a:xfrm>
-            <a:off x="85725" y="1143000"/>
-            <a:ext cx="6686550" cy="3086100"/>
+            <a:off x="2271713" y="1143000"/>
+            <a:ext cx="2314575" cy="3086100"/>
           </a:xfrm>
           <a:custGeom>
             <a:avLst/>
@@ -1246,7 +1246,7 @@
         <a:srgbClr val="000000"/>
       </a:buClr>
       <a:buFont typeface="Arial"/>
-      <a:defRPr sz="1400" b="0" i="0" u="none" strike="noStrike" cap="none">
+      <a:defRPr sz="655" b="0" i="0" u="none" strike="noStrike" cap="none">
         <a:solidFill>
           <a:srgbClr val="000000"/>
         </a:solidFill>
@@ -1270,7 +1270,7 @@
         <a:srgbClr val="000000"/>
       </a:buClr>
       <a:buFont typeface="Arial"/>
-      <a:defRPr sz="1400" b="0" i="0" u="none" strike="noStrike" cap="none">
+      <a:defRPr sz="655" b="0" i="0" u="none" strike="noStrike" cap="none">
         <a:solidFill>
           <a:srgbClr val="000000"/>
         </a:solidFill>
@@ -1294,7 +1294,7 @@
         <a:srgbClr val="000000"/>
       </a:buClr>
       <a:buFont typeface="Arial"/>
-      <a:defRPr sz="1400" b="0" i="0" u="none" strike="noStrike" cap="none">
+      <a:defRPr sz="655" b="0" i="0" u="none" strike="noStrike" cap="none">
         <a:solidFill>
           <a:srgbClr val="000000"/>
         </a:solidFill>
@@ -1318,7 +1318,7 @@
         <a:srgbClr val="000000"/>
       </a:buClr>
       <a:buFont typeface="Arial"/>
-      <a:defRPr sz="1400" b="0" i="0" u="none" strike="noStrike" cap="none">
+      <a:defRPr sz="655" b="0" i="0" u="none" strike="noStrike" cap="none">
         <a:solidFill>
           <a:srgbClr val="000000"/>
         </a:solidFill>
@@ -1342,7 +1342,7 @@
         <a:srgbClr val="000000"/>
       </a:buClr>
       <a:buFont typeface="Arial"/>
-      <a:defRPr sz="1400" b="0" i="0" u="none" strike="noStrike" cap="none">
+      <a:defRPr sz="655" b="0" i="0" u="none" strike="noStrike" cap="none">
         <a:solidFill>
           <a:srgbClr val="000000"/>
         </a:solidFill>
@@ -1366,7 +1366,7 @@
         <a:srgbClr val="000000"/>
       </a:buClr>
       <a:buFont typeface="Arial"/>
-      <a:defRPr sz="1400" b="0" i="0" u="none" strike="noStrike" cap="none">
+      <a:defRPr sz="655" b="0" i="0" u="none" strike="noStrike" cap="none">
         <a:solidFill>
           <a:srgbClr val="000000"/>
         </a:solidFill>
@@ -1390,7 +1390,7 @@
         <a:srgbClr val="000000"/>
       </a:buClr>
       <a:buFont typeface="Arial"/>
-      <a:defRPr sz="1400" b="0" i="0" u="none" strike="noStrike" cap="none">
+      <a:defRPr sz="655" b="0" i="0" u="none" strike="noStrike" cap="none">
         <a:solidFill>
           <a:srgbClr val="000000"/>
         </a:solidFill>
@@ -1414,7 +1414,7 @@
         <a:srgbClr val="000000"/>
       </a:buClr>
       <a:buFont typeface="Arial"/>
-      <a:defRPr sz="1400" b="0" i="0" u="none" strike="noStrike" cap="none">
+      <a:defRPr sz="655" b="0" i="0" u="none" strike="noStrike" cap="none">
         <a:solidFill>
           <a:srgbClr val="000000"/>
         </a:solidFill>
@@ -1438,7 +1438,7 @@
         <a:srgbClr val="000000"/>
       </a:buClr>
       <a:buFont typeface="Arial"/>
-      <a:defRPr sz="1400" b="0" i="0" u="none" strike="noStrike" cap="none">
+      <a:defRPr sz="655" b="0" i="0" u="none" strike="noStrike" cap="none">
         <a:solidFill>
           <a:srgbClr val="000000"/>
         </a:solidFill>
@@ -1481,8 +1481,8 @@
         </p:nvSpPr>
         <p:spPr>
           <a:xfrm>
-            <a:off x="85725" y="1143000"/>
-            <a:ext cx="6686550" cy="3086100"/>
+            <a:off x="2271713" y="1143000"/>
+            <a:ext cx="2314575" cy="3086100"/>
           </a:xfrm>
           <a:custGeom>
             <a:avLst/>
@@ -1558,7 +1558,7 @@
               </a:spcAft>
               <a:buNone/>
             </a:pPr>
-            <a:endParaRPr/>
+            <a:endParaRPr dirty="0"/>
           </a:p>
         </p:txBody>
       </p:sp>
@@ -1645,8 +1645,8 @@
         </p:nvSpPr>
         <p:spPr>
           <a:xfrm>
-            <a:off x="2924972" y="1767463"/>
-            <a:ext cx="17549813" cy="3759918"/>
+            <a:off x="857251" y="1496485"/>
+            <a:ext cx="5143500" cy="3183467"/>
           </a:xfrm>
           <a:prstGeom prst="rect">
             <a:avLst/>
@@ -1785,8 +1785,8 @@
         </p:nvSpPr>
         <p:spPr>
           <a:xfrm>
-            <a:off x="2924972" y="5672377"/>
-            <a:ext cx="17549813" cy="2607443"/>
+            <a:off x="857251" y="4802719"/>
+            <a:ext cx="5143500" cy="2207684"/>
           </a:xfrm>
           <a:prstGeom prst="rect">
             <a:avLst/>
@@ -1972,8 +1972,8 @@
         </p:nvSpPr>
         <p:spPr>
           <a:xfrm>
-            <a:off x="1608734" y="10009781"/>
-            <a:ext cx="5264943" cy="574987"/>
+            <a:off x="471488" y="8475136"/>
+            <a:ext cx="1543050" cy="486833"/>
           </a:xfrm>
           <a:prstGeom prst="rect">
             <a:avLst/>
@@ -2105,8 +2105,8 @@
         </p:nvSpPr>
         <p:spPr>
           <a:xfrm>
-            <a:off x="7751168" y="10009781"/>
-            <a:ext cx="7897416" cy="574987"/>
+            <a:off x="2271713" y="8475136"/>
+            <a:ext cx="2314575" cy="486833"/>
           </a:xfrm>
           <a:prstGeom prst="rect">
             <a:avLst/>
@@ -2238,8 +2238,8 @@
         </p:nvSpPr>
         <p:spPr>
           <a:xfrm>
-            <a:off x="16526077" y="10009781"/>
-            <a:ext cx="5264943" cy="574987"/>
+            <a:off x="4843463" y="8475136"/>
+            <a:ext cx="1543050" cy="486833"/>
           </a:xfrm>
           <a:prstGeom prst="rect">
             <a:avLst/>
@@ -2365,8 +2365,8 @@
         </p:nvSpPr>
         <p:spPr>
           <a:xfrm>
-            <a:off x="1608734" y="574988"/>
-            <a:ext cx="20182285" cy="2087455"/>
+            <a:off x="471488" y="486835"/>
+            <a:ext cx="5915025" cy="1767417"/>
           </a:xfrm>
           <a:prstGeom prst="rect">
             <a:avLst/>
@@ -2504,8 +2504,8 @@
         </p:nvSpPr>
         <p:spPr>
           <a:xfrm rot="5400000">
-            <a:off x="8273702" y="-3790028"/>
-            <a:ext cx="6852351" cy="20182285"/>
+            <a:off x="528109" y="2377549"/>
+            <a:ext cx="5801784" cy="5915025"/>
           </a:xfrm>
           <a:prstGeom prst="rect">
             <a:avLst/>
@@ -2691,8 +2691,8 @@
         </p:nvSpPr>
         <p:spPr>
           <a:xfrm>
-            <a:off x="1608734" y="10009781"/>
-            <a:ext cx="5264943" cy="574987"/>
+            <a:off x="471488" y="8475136"/>
+            <a:ext cx="1543050" cy="486833"/>
           </a:xfrm>
           <a:prstGeom prst="rect">
             <a:avLst/>
@@ -2824,8 +2824,8 @@
         </p:nvSpPr>
         <p:spPr>
           <a:xfrm>
-            <a:off x="7751168" y="10009781"/>
-            <a:ext cx="7897416" cy="574987"/>
+            <a:off x="2271713" y="8475136"/>
+            <a:ext cx="2314575" cy="486833"/>
           </a:xfrm>
           <a:prstGeom prst="rect">
             <a:avLst/>
@@ -2957,8 +2957,8 @@
         </p:nvSpPr>
         <p:spPr>
           <a:xfrm>
-            <a:off x="16526077" y="10009781"/>
-            <a:ext cx="5264943" cy="574987"/>
+            <a:off x="4843463" y="8475136"/>
+            <a:ext cx="1543050" cy="486833"/>
           </a:xfrm>
           <a:prstGeom prst="rect">
             <a:avLst/>
@@ -3084,8 +3084,8 @@
         </p:nvSpPr>
         <p:spPr>
           <a:xfrm rot="5400000">
-            <a:off x="14692081" y="2628354"/>
-            <a:ext cx="9152301" cy="5045571"/>
+            <a:off x="1772575" y="3622017"/>
+            <a:ext cx="7749119" cy="1478756"/>
           </a:xfrm>
           <a:prstGeom prst="rect">
             <a:avLst/>
@@ -3223,8 +3223,8 @@
         </p:nvSpPr>
         <p:spPr>
           <a:xfrm rot="5400000">
-            <a:off x="4454691" y="-2270970"/>
-            <a:ext cx="9152301" cy="14844216"/>
+            <a:off x="-1227800" y="2186121"/>
+            <a:ext cx="7749119" cy="4350544"/>
           </a:xfrm>
           <a:prstGeom prst="rect">
             <a:avLst/>
@@ -3410,8 +3410,8 @@
         </p:nvSpPr>
         <p:spPr>
           <a:xfrm>
-            <a:off x="1608734" y="10009781"/>
-            <a:ext cx="5264943" cy="574987"/>
+            <a:off x="471488" y="8475136"/>
+            <a:ext cx="1543050" cy="486833"/>
           </a:xfrm>
           <a:prstGeom prst="rect">
             <a:avLst/>
@@ -3543,8 +3543,8 @@
         </p:nvSpPr>
         <p:spPr>
           <a:xfrm>
-            <a:off x="7751168" y="10009781"/>
-            <a:ext cx="7897416" cy="574987"/>
+            <a:off x="2271713" y="8475136"/>
+            <a:ext cx="2314575" cy="486833"/>
           </a:xfrm>
           <a:prstGeom prst="rect">
             <a:avLst/>
@@ -3676,8 +3676,8 @@
         </p:nvSpPr>
         <p:spPr>
           <a:xfrm>
-            <a:off x="16526077" y="10009781"/>
-            <a:ext cx="5264943" cy="574987"/>
+            <a:off x="4843463" y="8475136"/>
+            <a:ext cx="1543050" cy="486833"/>
           </a:xfrm>
           <a:prstGeom prst="rect">
             <a:avLst/>
@@ -3803,8 +3803,8 @@
         </p:nvSpPr>
         <p:spPr>
           <a:xfrm>
-            <a:off x="1608734" y="574988"/>
-            <a:ext cx="20182285" cy="2087455"/>
+            <a:off x="471488" y="486835"/>
+            <a:ext cx="5915025" cy="1767417"/>
           </a:xfrm>
           <a:prstGeom prst="rect">
             <a:avLst/>
@@ -3942,8 +3942,8 @@
         </p:nvSpPr>
         <p:spPr>
           <a:xfrm>
-            <a:off x="1608734" y="2874938"/>
-            <a:ext cx="20182285" cy="6852351"/>
+            <a:off x="471488" y="2434168"/>
+            <a:ext cx="5915025" cy="5801784"/>
           </a:xfrm>
           <a:prstGeom prst="rect">
             <a:avLst/>
@@ -4129,8 +4129,8 @@
         </p:nvSpPr>
         <p:spPr>
           <a:xfrm>
-            <a:off x="1608734" y="10009781"/>
-            <a:ext cx="5264943" cy="574987"/>
+            <a:off x="471488" y="8475136"/>
+            <a:ext cx="1543050" cy="486833"/>
           </a:xfrm>
           <a:prstGeom prst="rect">
             <a:avLst/>
@@ -4262,8 +4262,8 @@
         </p:nvSpPr>
         <p:spPr>
           <a:xfrm>
-            <a:off x="7751168" y="10009781"/>
-            <a:ext cx="7897416" cy="574987"/>
+            <a:off x="2271713" y="8475136"/>
+            <a:ext cx="2314575" cy="486833"/>
           </a:xfrm>
           <a:prstGeom prst="rect">
             <a:avLst/>
@@ -4395,8 +4395,8 @@
         </p:nvSpPr>
         <p:spPr>
           <a:xfrm>
-            <a:off x="16526077" y="10009781"/>
-            <a:ext cx="5264943" cy="574987"/>
+            <a:off x="4843463" y="8475136"/>
+            <a:ext cx="1543050" cy="486833"/>
           </a:xfrm>
           <a:prstGeom prst="rect">
             <a:avLst/>
@@ -4522,8 +4522,8 @@
         </p:nvSpPr>
         <p:spPr>
           <a:xfrm>
-            <a:off x="1596548" y="2692445"/>
-            <a:ext cx="20182285" cy="4492400"/>
+            <a:off x="467917" y="2279654"/>
+            <a:ext cx="5915025" cy="3803649"/>
           </a:xfrm>
           <a:prstGeom prst="rect">
             <a:avLst/>
@@ -4662,8 +4662,8 @@
         </p:nvSpPr>
         <p:spPr>
           <a:xfrm>
-            <a:off x="1596548" y="7227344"/>
-            <a:ext cx="20182285" cy="2362448"/>
+            <a:off x="467917" y="6119286"/>
+            <a:ext cx="5915025" cy="2000249"/>
           </a:xfrm>
           <a:prstGeom prst="rect">
             <a:avLst/>
@@ -4885,8 +4885,8 @@
         </p:nvSpPr>
         <p:spPr>
           <a:xfrm>
-            <a:off x="1608734" y="10009781"/>
-            <a:ext cx="5264943" cy="574987"/>
+            <a:off x="471488" y="8475136"/>
+            <a:ext cx="1543050" cy="486833"/>
           </a:xfrm>
           <a:prstGeom prst="rect">
             <a:avLst/>
@@ -5018,8 +5018,8 @@
         </p:nvSpPr>
         <p:spPr>
           <a:xfrm>
-            <a:off x="7751168" y="10009781"/>
-            <a:ext cx="7897416" cy="574987"/>
+            <a:off x="2271713" y="8475136"/>
+            <a:ext cx="2314575" cy="486833"/>
           </a:xfrm>
           <a:prstGeom prst="rect">
             <a:avLst/>
@@ -5151,8 +5151,8 @@
         </p:nvSpPr>
         <p:spPr>
           <a:xfrm>
-            <a:off x="16526077" y="10009781"/>
-            <a:ext cx="5264943" cy="574987"/>
+            <a:off x="4843463" y="8475136"/>
+            <a:ext cx="1543050" cy="486833"/>
           </a:xfrm>
           <a:prstGeom prst="rect">
             <a:avLst/>
@@ -5278,8 +5278,8 @@
         </p:nvSpPr>
         <p:spPr>
           <a:xfrm>
-            <a:off x="1608734" y="574988"/>
-            <a:ext cx="20182285" cy="2087455"/>
+            <a:off x="471488" y="486835"/>
+            <a:ext cx="5915025" cy="1767417"/>
           </a:xfrm>
           <a:prstGeom prst="rect">
             <a:avLst/>
@@ -5417,8 +5417,8 @@
         </p:nvSpPr>
         <p:spPr>
           <a:xfrm>
-            <a:off x="1608734" y="2874938"/>
-            <a:ext cx="9944894" cy="6852351"/>
+            <a:off x="471488" y="2434168"/>
+            <a:ext cx="2914650" cy="5801784"/>
           </a:xfrm>
           <a:prstGeom prst="rect">
             <a:avLst/>
@@ -5604,8 +5604,8 @@
         </p:nvSpPr>
         <p:spPr>
           <a:xfrm>
-            <a:off x="11846123" y="2874938"/>
-            <a:ext cx="9944894" cy="6852351"/>
+            <a:off x="3471863" y="2434168"/>
+            <a:ext cx="2914650" cy="5801784"/>
           </a:xfrm>
           <a:prstGeom prst="rect">
             <a:avLst/>
@@ -5791,8 +5791,8 @@
         </p:nvSpPr>
         <p:spPr>
           <a:xfrm>
-            <a:off x="1608734" y="10009781"/>
-            <a:ext cx="5264943" cy="574987"/>
+            <a:off x="471488" y="8475136"/>
+            <a:ext cx="1543050" cy="486833"/>
           </a:xfrm>
           <a:prstGeom prst="rect">
             <a:avLst/>
@@ -5924,8 +5924,8 @@
         </p:nvSpPr>
         <p:spPr>
           <a:xfrm>
-            <a:off x="7751168" y="10009781"/>
-            <a:ext cx="7897416" cy="574987"/>
+            <a:off x="2271713" y="8475136"/>
+            <a:ext cx="2314575" cy="486833"/>
           </a:xfrm>
           <a:prstGeom prst="rect">
             <a:avLst/>
@@ -6057,8 +6057,8 @@
         </p:nvSpPr>
         <p:spPr>
           <a:xfrm>
-            <a:off x="16526077" y="10009781"/>
-            <a:ext cx="5264943" cy="574987"/>
+            <a:off x="4843463" y="8475136"/>
+            <a:ext cx="1543050" cy="486833"/>
           </a:xfrm>
           <a:prstGeom prst="rect">
             <a:avLst/>
@@ -6184,8 +6184,8 @@
         </p:nvSpPr>
         <p:spPr>
           <a:xfrm>
-            <a:off x="1611782" y="574988"/>
-            <a:ext cx="20182285" cy="2087455"/>
+            <a:off x="472382" y="486835"/>
+            <a:ext cx="5915025" cy="1767417"/>
           </a:xfrm>
           <a:prstGeom prst="rect">
             <a:avLst/>
@@ -6323,8 +6323,8 @@
         </p:nvSpPr>
         <p:spPr>
           <a:xfrm>
-            <a:off x="1611781" y="2647445"/>
-            <a:ext cx="9899190" cy="1297471"/>
+            <a:off x="472381" y="2241554"/>
+            <a:ext cx="2901255" cy="1098549"/>
           </a:xfrm>
           <a:prstGeom prst="rect">
             <a:avLst/>
@@ -6510,8 +6510,8 @@
         </p:nvSpPr>
         <p:spPr>
           <a:xfrm>
-            <a:off x="1611781" y="3944913"/>
-            <a:ext cx="9899190" cy="5802373"/>
+            <a:off x="472381" y="3340100"/>
+            <a:ext cx="2901255" cy="4912784"/>
           </a:xfrm>
           <a:prstGeom prst="rect">
             <a:avLst/>
@@ -6697,8 +6697,8 @@
         </p:nvSpPr>
         <p:spPr>
           <a:xfrm>
-            <a:off x="11846124" y="2647445"/>
-            <a:ext cx="9947942" cy="1297471"/>
+            <a:off x="3471863" y="2241554"/>
+            <a:ext cx="2915543" cy="1098549"/>
           </a:xfrm>
           <a:prstGeom prst="rect">
             <a:avLst/>
@@ -6884,8 +6884,8 @@
         </p:nvSpPr>
         <p:spPr>
           <a:xfrm>
-            <a:off x="11846124" y="3944913"/>
-            <a:ext cx="9947942" cy="5802373"/>
+            <a:off x="3471863" y="3340100"/>
+            <a:ext cx="2915543" cy="4912784"/>
           </a:xfrm>
           <a:prstGeom prst="rect">
             <a:avLst/>
@@ -7071,8 +7071,8 @@
         </p:nvSpPr>
         <p:spPr>
           <a:xfrm>
-            <a:off x="1608734" y="10009781"/>
-            <a:ext cx="5264943" cy="574987"/>
+            <a:off x="471488" y="8475136"/>
+            <a:ext cx="1543050" cy="486833"/>
           </a:xfrm>
           <a:prstGeom prst="rect">
             <a:avLst/>
@@ -7204,8 +7204,8 @@
         </p:nvSpPr>
         <p:spPr>
           <a:xfrm>
-            <a:off x="7751168" y="10009781"/>
-            <a:ext cx="7897416" cy="574987"/>
+            <a:off x="2271713" y="8475136"/>
+            <a:ext cx="2314575" cy="486833"/>
           </a:xfrm>
           <a:prstGeom prst="rect">
             <a:avLst/>
@@ -7337,8 +7337,8 @@
         </p:nvSpPr>
         <p:spPr>
           <a:xfrm>
-            <a:off x="16526077" y="10009781"/>
-            <a:ext cx="5264943" cy="574987"/>
+            <a:off x="4843463" y="8475136"/>
+            <a:ext cx="1543050" cy="486833"/>
           </a:xfrm>
           <a:prstGeom prst="rect">
             <a:avLst/>
@@ -7464,8 +7464,8 @@
         </p:nvSpPr>
         <p:spPr>
           <a:xfrm>
-            <a:off x="1608734" y="574988"/>
-            <a:ext cx="20182285" cy="2087455"/>
+            <a:off x="471488" y="486835"/>
+            <a:ext cx="5915025" cy="1767417"/>
           </a:xfrm>
           <a:prstGeom prst="rect">
             <a:avLst/>
@@ -7603,8 +7603,8 @@
         </p:nvSpPr>
         <p:spPr>
           <a:xfrm>
-            <a:off x="1608734" y="10009781"/>
-            <a:ext cx="5264943" cy="574987"/>
+            <a:off x="471488" y="8475136"/>
+            <a:ext cx="1543050" cy="486833"/>
           </a:xfrm>
           <a:prstGeom prst="rect">
             <a:avLst/>
@@ -7736,8 +7736,8 @@
         </p:nvSpPr>
         <p:spPr>
           <a:xfrm>
-            <a:off x="7751168" y="10009781"/>
-            <a:ext cx="7897416" cy="574987"/>
+            <a:off x="2271713" y="8475136"/>
+            <a:ext cx="2314575" cy="486833"/>
           </a:xfrm>
           <a:prstGeom prst="rect">
             <a:avLst/>
@@ -7869,8 +7869,8 @@
         </p:nvSpPr>
         <p:spPr>
           <a:xfrm>
-            <a:off x="16526077" y="10009781"/>
-            <a:ext cx="5264943" cy="574987"/>
+            <a:off x="4843463" y="8475136"/>
+            <a:ext cx="1543050" cy="486833"/>
           </a:xfrm>
           <a:prstGeom prst="rect">
             <a:avLst/>
@@ -7996,8 +7996,8 @@
         </p:nvSpPr>
         <p:spPr>
           <a:xfrm>
-            <a:off x="1608734" y="10009781"/>
-            <a:ext cx="5264943" cy="574987"/>
+            <a:off x="471488" y="8475136"/>
+            <a:ext cx="1543050" cy="486833"/>
           </a:xfrm>
           <a:prstGeom prst="rect">
             <a:avLst/>
@@ -8129,8 +8129,8 @@
         </p:nvSpPr>
         <p:spPr>
           <a:xfrm>
-            <a:off x="7751168" y="10009781"/>
-            <a:ext cx="7897416" cy="574987"/>
+            <a:off x="2271713" y="8475136"/>
+            <a:ext cx="2314575" cy="486833"/>
           </a:xfrm>
           <a:prstGeom prst="rect">
             <a:avLst/>
@@ -8262,8 +8262,8 @@
         </p:nvSpPr>
         <p:spPr>
           <a:xfrm>
-            <a:off x="16526077" y="10009781"/>
-            <a:ext cx="5264943" cy="574987"/>
+            <a:off x="4843463" y="8475136"/>
+            <a:ext cx="1543050" cy="486833"/>
           </a:xfrm>
           <a:prstGeom prst="rect">
             <a:avLst/>
@@ -8389,8 +8389,8 @@
         </p:nvSpPr>
         <p:spPr>
           <a:xfrm>
-            <a:off x="1611781" y="719988"/>
-            <a:ext cx="7547028" cy="2519944"/>
+            <a:off x="472381" y="609603"/>
+            <a:ext cx="2211884" cy="2133600"/>
           </a:xfrm>
           <a:prstGeom prst="rect">
             <a:avLst/>
@@ -8529,8 +8529,8 @@
         </p:nvSpPr>
         <p:spPr>
           <a:xfrm>
-            <a:off x="9947943" y="1554968"/>
-            <a:ext cx="11846123" cy="7674832"/>
+            <a:off x="2915544" y="1316568"/>
+            <a:ext cx="3471863" cy="6498167"/>
           </a:xfrm>
           <a:prstGeom prst="rect">
             <a:avLst/>
@@ -8716,8 +8716,8 @@
         </p:nvSpPr>
         <p:spPr>
           <a:xfrm>
-            <a:off x="1611781" y="3239932"/>
-            <a:ext cx="7547028" cy="6002369"/>
+            <a:off x="472381" y="2743203"/>
+            <a:ext cx="2211884" cy="5082117"/>
           </a:xfrm>
           <a:prstGeom prst="rect">
             <a:avLst/>
@@ -8903,8 +8903,8 @@
         </p:nvSpPr>
         <p:spPr>
           <a:xfrm>
-            <a:off x="1608734" y="10009781"/>
-            <a:ext cx="5264943" cy="574987"/>
+            <a:off x="471488" y="8475136"/>
+            <a:ext cx="1543050" cy="486833"/>
           </a:xfrm>
           <a:prstGeom prst="rect">
             <a:avLst/>
@@ -9036,8 +9036,8 @@
         </p:nvSpPr>
         <p:spPr>
           <a:xfrm>
-            <a:off x="7751168" y="10009781"/>
-            <a:ext cx="7897416" cy="574987"/>
+            <a:off x="2271713" y="8475136"/>
+            <a:ext cx="2314575" cy="486833"/>
           </a:xfrm>
           <a:prstGeom prst="rect">
             <a:avLst/>
@@ -9169,8 +9169,8 @@
         </p:nvSpPr>
         <p:spPr>
           <a:xfrm>
-            <a:off x="16526077" y="10009781"/>
-            <a:ext cx="5264943" cy="574987"/>
+            <a:off x="4843463" y="8475136"/>
+            <a:ext cx="1543050" cy="486833"/>
           </a:xfrm>
           <a:prstGeom prst="rect">
             <a:avLst/>
@@ -9296,8 +9296,8 @@
         </p:nvSpPr>
         <p:spPr>
           <a:xfrm>
-            <a:off x="1611781" y="719988"/>
-            <a:ext cx="7547028" cy="2519944"/>
+            <a:off x="472381" y="609603"/>
+            <a:ext cx="2211884" cy="2133600"/>
           </a:xfrm>
           <a:prstGeom prst="rect">
             <a:avLst/>
@@ -9436,8 +9436,8 @@
         </p:nvSpPr>
         <p:spPr>
           <a:xfrm>
-            <a:off x="9947943" y="1554968"/>
-            <a:ext cx="11846123" cy="7674832"/>
+            <a:off x="2915544" y="1316568"/>
+            <a:ext cx="3471863" cy="6498167"/>
           </a:xfrm>
           <a:prstGeom prst="rect">
             <a:avLst/>
@@ -9460,8 +9460,8 @@
         </p:nvSpPr>
         <p:spPr>
           <a:xfrm>
-            <a:off x="1611781" y="3239932"/>
-            <a:ext cx="7547028" cy="6002369"/>
+            <a:off x="472381" y="2743203"/>
+            <a:ext cx="2211884" cy="5082117"/>
           </a:xfrm>
           <a:prstGeom prst="rect">
             <a:avLst/>
@@ -9647,8 +9647,8 @@
         </p:nvSpPr>
         <p:spPr>
           <a:xfrm>
-            <a:off x="1608734" y="10009781"/>
-            <a:ext cx="5264943" cy="574987"/>
+            <a:off x="471488" y="8475136"/>
+            <a:ext cx="1543050" cy="486833"/>
           </a:xfrm>
           <a:prstGeom prst="rect">
             <a:avLst/>
@@ -9780,8 +9780,8 @@
         </p:nvSpPr>
         <p:spPr>
           <a:xfrm>
-            <a:off x="7751168" y="10009781"/>
-            <a:ext cx="7897416" cy="574987"/>
+            <a:off x="2271713" y="8475136"/>
+            <a:ext cx="2314575" cy="486833"/>
           </a:xfrm>
           <a:prstGeom prst="rect">
             <a:avLst/>
@@ -9913,8 +9913,8 @@
         </p:nvSpPr>
         <p:spPr>
           <a:xfrm>
-            <a:off x="16526077" y="10009781"/>
-            <a:ext cx="5264943" cy="574987"/>
+            <a:off x="4843463" y="8475136"/>
+            <a:ext cx="1543050" cy="486833"/>
           </a:xfrm>
           <a:prstGeom prst="rect">
             <a:avLst/>
@@ -10048,8 +10048,8 @@
         </p:nvSpPr>
         <p:spPr>
           <a:xfrm>
-            <a:off x="1608734" y="574988"/>
-            <a:ext cx="20182285" cy="2087455"/>
+            <a:off x="471488" y="486835"/>
+            <a:ext cx="5915025" cy="1767417"/>
           </a:xfrm>
           <a:prstGeom prst="rect">
             <a:avLst/>
@@ -10196,8 +10196,8 @@
         </p:nvSpPr>
         <p:spPr>
           <a:xfrm>
-            <a:off x="1608734" y="2874938"/>
-            <a:ext cx="20182285" cy="6852351"/>
+            <a:off x="471488" y="2434168"/>
+            <a:ext cx="5915025" cy="5801784"/>
           </a:xfrm>
           <a:prstGeom prst="rect">
             <a:avLst/>
@@ -10464,8 +10464,8 @@
         </p:nvSpPr>
         <p:spPr>
           <a:xfrm>
-            <a:off x="1608734" y="10009781"/>
-            <a:ext cx="5264943" cy="574987"/>
+            <a:off x="471488" y="8475136"/>
+            <a:ext cx="1543050" cy="486833"/>
           </a:xfrm>
           <a:prstGeom prst="rect">
             <a:avLst/>
@@ -10669,8 +10669,8 @@
         </p:nvSpPr>
         <p:spPr>
           <a:xfrm>
-            <a:off x="7751168" y="10009781"/>
-            <a:ext cx="7897416" cy="574987"/>
+            <a:off x="2271713" y="8475136"/>
+            <a:ext cx="2314575" cy="486833"/>
           </a:xfrm>
           <a:prstGeom prst="rect">
             <a:avLst/>
@@ -10874,8 +10874,8 @@
         </p:nvSpPr>
         <p:spPr>
           <a:xfrm>
-            <a:off x="16526077" y="10009781"/>
-            <a:ext cx="5264943" cy="574987"/>
+            <a:off x="4843463" y="8475136"/>
+            <a:ext cx="1543050" cy="486833"/>
           </a:xfrm>
           <a:prstGeom prst="rect">
             <a:avLst/>
@@ -11762,12 +11762,73 @@
           <a:chExt cx="0" cy="0"/>
         </a:xfrm>
       </p:grpSpPr>
+      <p:pic>
+        <p:nvPicPr>
+          <p:cNvPr id="28" name="Picture 27">
+            <a:extLst>
+              <a:ext uri="{FF2B5EF4-FFF2-40B4-BE49-F238E27FC236}">
+                <a16:creationId xmlns:a16="http://schemas.microsoft.com/office/drawing/2014/main" id="{06FEC50F-EF92-20F5-CD4C-167CE985A7D8}"/>
+              </a:ext>
+            </a:extLst>
+          </p:cNvPr>
+          <p:cNvPicPr>
+            <a:picLocks noChangeAspect="1"/>
+          </p:cNvPicPr>
+          <p:nvPr/>
+        </p:nvPicPr>
+        <p:blipFill>
+          <a:blip r:embed="rId3"/>
+          <a:stretch>
+            <a:fillRect/>
+          </a:stretch>
+        </p:blipFill>
+        <p:spPr>
+          <a:xfrm>
+            <a:off x="4061618" y="21842"/>
+            <a:ext cx="2796382" cy="1024027"/>
+          </a:xfrm>
+          <a:prstGeom prst="rect">
+            <a:avLst/>
+          </a:prstGeom>
+        </p:spPr>
+      </p:pic>
+      <p:pic>
+        <p:nvPicPr>
+          <p:cNvPr id="32" name="Picture 31">
+            <a:extLst>
+              <a:ext uri="{FF2B5EF4-FFF2-40B4-BE49-F238E27FC236}">
+                <a16:creationId xmlns:a16="http://schemas.microsoft.com/office/drawing/2014/main" id="{D056619A-1995-C1C3-B0FD-12E606CCD169}"/>
+              </a:ext>
+            </a:extLst>
+          </p:cNvPr>
+          <p:cNvPicPr>
+            <a:picLocks noChangeAspect="1"/>
+          </p:cNvPicPr>
+          <p:nvPr/>
+        </p:nvPicPr>
+        <p:blipFill>
+          <a:blip r:embed="rId4"/>
+          <a:srcRect l="2439"/>
+          <a:stretch>
+            <a:fillRect/>
+          </a:stretch>
+        </p:blipFill>
+        <p:spPr>
+          <a:xfrm>
+            <a:off x="0" y="76434"/>
+            <a:ext cx="2081743" cy="3552124"/>
+          </a:xfrm>
+          <a:prstGeom prst="rect">
+            <a:avLst/>
+          </a:prstGeom>
+        </p:spPr>
+      </p:pic>
       <p:sp>
         <p:nvSpPr>
-          <p:cNvPr id="198" name="Google Shape;93;p1">
+          <p:cNvPr id="23" name="Google Shape;93;p1">
             <a:extLst>
               <a:ext uri="{FF2B5EF4-FFF2-40B4-BE49-F238E27FC236}">
-                <a16:creationId xmlns:a16="http://schemas.microsoft.com/office/drawing/2014/main" id="{A26A9C3E-AFAD-B893-0962-7929727ED853}"/>
+                <a16:creationId xmlns:a16="http://schemas.microsoft.com/office/drawing/2014/main" id="{89D3D9B4-E0E7-614F-141F-4F0F353F5FEF}"/>
               </a:ext>
             </a:extLst>
           </p:cNvPr>
@@ -11776,8 +11837,8 @@
         </p:nvSpPr>
         <p:spPr>
           <a:xfrm>
-            <a:off x="174908" y="281352"/>
-            <a:ext cx="667265" cy="369332"/>
+            <a:off x="0" y="-3004"/>
+            <a:ext cx="667265" cy="276959"/>
           </a:xfrm>
           <a:prstGeom prst="rect">
             <a:avLst/>
@@ -11803,27 +11864,113 @@
               <a:buNone/>
             </a:pPr>
             <a:r>
-              <a:rPr lang="en-US" sz="1800" b="0" i="0" u="none" strike="noStrike" cap="none" dirty="0">
+              <a:rPr lang="en-US" sz="1200" b="1" dirty="0">
                 <a:solidFill>
                   <a:schemeClr val="dk1"/>
                 </a:solidFill>
-                <a:latin typeface="Arial"/>
-                <a:ea typeface="Arial"/>
-                <a:cs typeface="Arial"/>
-                <a:sym typeface="Arial"/>
               </a:rPr>
               <a:t>a</a:t>
             </a:r>
-            <a:endParaRPr dirty="0"/>
+            <a:endParaRPr sz="1200" b="1" dirty="0"/>
           </a:p>
         </p:txBody>
       </p:sp>
+      <p:pic>
+        <p:nvPicPr>
+          <p:cNvPr id="30" name="Picture 29">
+            <a:extLst>
+              <a:ext uri="{FF2B5EF4-FFF2-40B4-BE49-F238E27FC236}">
+                <a16:creationId xmlns:a16="http://schemas.microsoft.com/office/drawing/2014/main" id="{20E6B068-1E9B-A276-354B-7A5C1B202181}"/>
+              </a:ext>
+            </a:extLst>
+          </p:cNvPr>
+          <p:cNvPicPr>
+            <a:picLocks noChangeAspect="1"/>
+          </p:cNvPicPr>
+          <p:nvPr/>
+        </p:nvPicPr>
+        <p:blipFill>
+          <a:blip r:embed="rId5"/>
+          <a:stretch>
+            <a:fillRect/>
+          </a:stretch>
+        </p:blipFill>
+        <p:spPr>
+          <a:xfrm>
+            <a:off x="4076544" y="1045869"/>
+            <a:ext cx="2781456" cy="1018561"/>
+          </a:xfrm>
+          <a:prstGeom prst="rect">
+            <a:avLst/>
+          </a:prstGeom>
+        </p:spPr>
+      </p:pic>
+      <p:pic>
+        <p:nvPicPr>
+          <p:cNvPr id="31" name="Picture 30">
+            <a:extLst>
+              <a:ext uri="{FF2B5EF4-FFF2-40B4-BE49-F238E27FC236}">
+                <a16:creationId xmlns:a16="http://schemas.microsoft.com/office/drawing/2014/main" id="{0A9D1A02-9E6F-7891-BD70-4CC94F58AD9C}"/>
+              </a:ext>
+            </a:extLst>
+          </p:cNvPr>
+          <p:cNvPicPr>
+            <a:picLocks noChangeAspect="1"/>
+          </p:cNvPicPr>
+          <p:nvPr/>
+        </p:nvPicPr>
+        <p:blipFill>
+          <a:blip r:embed="rId6"/>
+          <a:stretch>
+            <a:fillRect/>
+          </a:stretch>
+        </p:blipFill>
+        <p:spPr>
+          <a:xfrm>
+            <a:off x="2231688" y="78486"/>
+            <a:ext cx="1559175" cy="2119322"/>
+          </a:xfrm>
+          <a:prstGeom prst="rect">
+            <a:avLst/>
+          </a:prstGeom>
+        </p:spPr>
+      </p:pic>
+      <p:pic>
+        <p:nvPicPr>
+          <p:cNvPr id="35" name="Picture 34">
+            <a:extLst>
+              <a:ext uri="{FF2B5EF4-FFF2-40B4-BE49-F238E27FC236}">
+                <a16:creationId xmlns:a16="http://schemas.microsoft.com/office/drawing/2014/main" id="{64B5A5D9-5AD8-75AE-4076-84B6B19CA9E4}"/>
+              </a:ext>
+            </a:extLst>
+          </p:cNvPr>
+          <p:cNvPicPr>
+            <a:picLocks noChangeAspect="1"/>
+          </p:cNvPicPr>
+          <p:nvPr/>
+        </p:nvPicPr>
+        <p:blipFill>
+          <a:blip r:embed="rId7"/>
+          <a:stretch>
+            <a:fillRect/>
+          </a:stretch>
+        </p:blipFill>
+        <p:spPr>
+          <a:xfrm>
+            <a:off x="4437030" y="2234889"/>
+            <a:ext cx="2027028" cy="1520271"/>
+          </a:xfrm>
+          <a:prstGeom prst="rect">
+            <a:avLst/>
+          </a:prstGeom>
+        </p:spPr>
+      </p:pic>
       <p:sp>
         <p:nvSpPr>
-          <p:cNvPr id="199" name="Google Shape;94;p1">
+          <p:cNvPr id="40" name="Google Shape;93;p1">
             <a:extLst>
               <a:ext uri="{FF2B5EF4-FFF2-40B4-BE49-F238E27FC236}">
-                <a16:creationId xmlns:a16="http://schemas.microsoft.com/office/drawing/2014/main" id="{18D127CE-F949-7C89-6F1C-F7381E1AADF3}"/>
+                <a16:creationId xmlns:a16="http://schemas.microsoft.com/office/drawing/2014/main" id="{04AF3426-4E22-EAD2-FC76-3BFA937B5A13}"/>
               </a:ext>
             </a:extLst>
           </p:cNvPr>
@@ -11832,8 +11979,8 @@
         </p:nvSpPr>
         <p:spPr>
           <a:xfrm>
-            <a:off x="5349472" y="281352"/>
-            <a:ext cx="667265" cy="369332"/>
+            <a:off x="1977682" y="0"/>
+            <a:ext cx="667265" cy="276959"/>
           </a:xfrm>
           <a:prstGeom prst="rect">
             <a:avLst/>
@@ -11859,27 +12006,23 @@
               <a:buNone/>
             </a:pPr>
             <a:r>
-              <a:rPr lang="en-US" sz="1800" dirty="0">
+              <a:rPr lang="en-US" sz="1200" b="1" dirty="0">
                 <a:solidFill>
                   <a:schemeClr val="dk1"/>
                 </a:solidFill>
-                <a:latin typeface="Arial"/>
-                <a:ea typeface="Arial"/>
-                <a:cs typeface="Arial"/>
-                <a:sym typeface="Arial"/>
               </a:rPr>
               <a:t>b</a:t>
             </a:r>
-            <a:endParaRPr dirty="0"/>
+            <a:endParaRPr sz="1200" b="1" dirty="0"/>
           </a:p>
         </p:txBody>
       </p:sp>
       <p:sp>
         <p:nvSpPr>
-          <p:cNvPr id="200" name="Google Shape;95;p1">
+          <p:cNvPr id="41" name="Google Shape;93;p1">
             <a:extLst>
               <a:ext uri="{FF2B5EF4-FFF2-40B4-BE49-F238E27FC236}">
-                <a16:creationId xmlns:a16="http://schemas.microsoft.com/office/drawing/2014/main" id="{E1736F1E-127D-E931-9019-84737A730140}"/>
+                <a16:creationId xmlns:a16="http://schemas.microsoft.com/office/drawing/2014/main" id="{A5AFC892-CA4C-37D4-E3F7-B639D548EF8A}"/>
               </a:ext>
             </a:extLst>
           </p:cNvPr>
@@ -11888,8 +12031,8 @@
         </p:nvSpPr>
         <p:spPr>
           <a:xfrm>
-            <a:off x="9669105" y="301974"/>
-            <a:ext cx="667265" cy="369332"/>
+            <a:off x="3805824" y="0"/>
+            <a:ext cx="667265" cy="276959"/>
           </a:xfrm>
           <a:prstGeom prst="rect">
             <a:avLst/>
@@ -11915,27 +12058,23 @@
               <a:buNone/>
             </a:pPr>
             <a:r>
-              <a:rPr lang="en-US" sz="1800" dirty="0">
+              <a:rPr lang="en-US" sz="1200" b="1" dirty="0">
                 <a:solidFill>
                   <a:schemeClr val="dk1"/>
                 </a:solidFill>
-                <a:latin typeface="Arial"/>
-                <a:ea typeface="Arial"/>
-                <a:cs typeface="Arial"/>
-                <a:sym typeface="Arial"/>
               </a:rPr>
               <a:t>c</a:t>
             </a:r>
-            <a:endParaRPr dirty="0"/>
+            <a:endParaRPr sz="1200" b="1" dirty="0"/>
           </a:p>
         </p:txBody>
       </p:sp>
       <p:sp>
         <p:nvSpPr>
-          <p:cNvPr id="201" name="Google Shape;99;p1">
+          <p:cNvPr id="42" name="Google Shape;93;p1">
             <a:extLst>
               <a:ext uri="{FF2B5EF4-FFF2-40B4-BE49-F238E27FC236}">
-                <a16:creationId xmlns:a16="http://schemas.microsoft.com/office/drawing/2014/main" id="{CF6DDB1C-C9D5-982D-4D09-833B127A2837}"/>
+                <a16:creationId xmlns:a16="http://schemas.microsoft.com/office/drawing/2014/main" id="{B75F7EF8-A70D-FDC6-8006-9F3773889A95}"/>
               </a:ext>
             </a:extLst>
           </p:cNvPr>
@@ -11944,8 +12083,8 @@
         </p:nvSpPr>
         <p:spPr>
           <a:xfrm>
-            <a:off x="16252476" y="301974"/>
-            <a:ext cx="667265" cy="369291"/>
+            <a:off x="2012653" y="2161124"/>
+            <a:ext cx="667265" cy="276959"/>
           </a:xfrm>
           <a:prstGeom prst="rect">
             <a:avLst/>
@@ -11971,23 +12110,23 @@
               <a:buNone/>
             </a:pPr>
             <a:r>
-              <a:rPr lang="en-US" sz="1800" dirty="0">
+              <a:rPr lang="en-US" sz="1200" b="1" dirty="0">
                 <a:solidFill>
                   <a:schemeClr val="dk1"/>
                 </a:solidFill>
               </a:rPr>
               <a:t>d</a:t>
             </a:r>
-            <a:endParaRPr dirty="0"/>
+            <a:endParaRPr sz="1200" b="1" dirty="0"/>
           </a:p>
         </p:txBody>
       </p:sp>
       <p:sp>
         <p:nvSpPr>
-          <p:cNvPr id="202" name="Google Shape;135;p1">
+          <p:cNvPr id="43" name="Google Shape;93;p1">
             <a:extLst>
               <a:ext uri="{FF2B5EF4-FFF2-40B4-BE49-F238E27FC236}">
-                <a16:creationId xmlns:a16="http://schemas.microsoft.com/office/drawing/2014/main" id="{2286F144-0098-EE85-F655-62675975370B}"/>
+                <a16:creationId xmlns:a16="http://schemas.microsoft.com/office/drawing/2014/main" id="{A3EB12CC-7E97-04A9-A03C-EF150A32E40A}"/>
               </a:ext>
             </a:extLst>
           </p:cNvPr>
@@ -11996,8 +12135,8 @@
         </p:nvSpPr>
         <p:spPr>
           <a:xfrm>
-            <a:off x="5585127" y="5284575"/>
-            <a:ext cx="667265" cy="369332"/>
+            <a:off x="4315135" y="2161124"/>
+            <a:ext cx="667265" cy="276959"/>
           </a:xfrm>
           <a:prstGeom prst="rect">
             <a:avLst/>
@@ -12023,226 +12162,23 @@
               <a:buNone/>
             </a:pPr>
             <a:r>
-              <a:rPr lang="en-US" sz="1800" dirty="0">
+              <a:rPr lang="en-US" sz="1200" b="1" dirty="0">
                 <a:solidFill>
                   <a:schemeClr val="dk1"/>
                 </a:solidFill>
               </a:rPr>
               <a:t>e</a:t>
             </a:r>
-            <a:endParaRPr dirty="0"/>
+            <a:endParaRPr sz="1200" b="1" dirty="0"/>
           </a:p>
         </p:txBody>
       </p:sp>
       <p:pic>
         <p:nvPicPr>
-          <p:cNvPr id="205" name="Picture 204">
+          <p:cNvPr id="45" name="Picture 44">
             <a:extLst>
               <a:ext uri="{FF2B5EF4-FFF2-40B4-BE49-F238E27FC236}">
-                <a16:creationId xmlns:a16="http://schemas.microsoft.com/office/drawing/2014/main" id="{5CEC6E7E-2237-0903-7F29-783CD0A09C5C}"/>
-              </a:ext>
-            </a:extLst>
-          </p:cNvPr>
-          <p:cNvPicPr>
-            <a:picLocks noChangeAspect="1"/>
-          </p:cNvPicPr>
-          <p:nvPr/>
-        </p:nvPicPr>
-        <p:blipFill>
-          <a:blip r:embed="rId3"/>
-          <a:stretch>
-            <a:fillRect/>
-          </a:stretch>
-        </p:blipFill>
-        <p:spPr>
-          <a:xfrm>
-            <a:off x="10002737" y="312349"/>
-            <a:ext cx="6097289" cy="2232810"/>
-          </a:xfrm>
-          <a:prstGeom prst="rect">
-            <a:avLst/>
-          </a:prstGeom>
-        </p:spPr>
-      </p:pic>
-      <p:pic>
-        <p:nvPicPr>
-          <p:cNvPr id="206" name="Picture 205">
-            <a:extLst>
-              <a:ext uri="{FF2B5EF4-FFF2-40B4-BE49-F238E27FC236}">
-                <a16:creationId xmlns:a16="http://schemas.microsoft.com/office/drawing/2014/main" id="{CD0863BC-9899-F469-B76D-C4A6D60F4F28}"/>
-              </a:ext>
-            </a:extLst>
-          </p:cNvPr>
-          <p:cNvPicPr>
-            <a:picLocks noChangeAspect="1"/>
-          </p:cNvPicPr>
-          <p:nvPr/>
-        </p:nvPicPr>
-        <p:blipFill>
-          <a:blip r:embed="rId4"/>
-          <a:stretch>
-            <a:fillRect/>
-          </a:stretch>
-        </p:blipFill>
-        <p:spPr>
-          <a:xfrm>
-            <a:off x="9956995" y="2628726"/>
-            <a:ext cx="6081767" cy="2227126"/>
-          </a:xfrm>
-          <a:prstGeom prst="rect">
-            <a:avLst/>
-          </a:prstGeom>
-        </p:spPr>
-      </p:pic>
-      <p:pic>
-        <p:nvPicPr>
-          <p:cNvPr id="207" name="Picture 206">
-            <a:extLst>
-              <a:ext uri="{FF2B5EF4-FFF2-40B4-BE49-F238E27FC236}">
-                <a16:creationId xmlns:a16="http://schemas.microsoft.com/office/drawing/2014/main" id="{071A8CA3-2BF2-8B78-A067-6341550D076F}"/>
-              </a:ext>
-            </a:extLst>
-          </p:cNvPr>
-          <p:cNvPicPr>
-            <a:picLocks noChangeAspect="1"/>
-          </p:cNvPicPr>
-          <p:nvPr/>
-        </p:nvPicPr>
-        <p:blipFill>
-          <a:blip r:embed="rId5"/>
-          <a:stretch>
-            <a:fillRect/>
-          </a:stretch>
-        </p:blipFill>
-        <p:spPr>
-          <a:xfrm>
-            <a:off x="5598293" y="312349"/>
-            <a:ext cx="3429000" cy="4660900"/>
-          </a:xfrm>
-          <a:prstGeom prst="rect">
-            <a:avLst/>
-          </a:prstGeom>
-        </p:spPr>
-      </p:pic>
-      <p:pic>
-        <p:nvPicPr>
-          <p:cNvPr id="221" name="Picture 220">
-            <a:extLst>
-              <a:ext uri="{FF2B5EF4-FFF2-40B4-BE49-F238E27FC236}">
-                <a16:creationId xmlns:a16="http://schemas.microsoft.com/office/drawing/2014/main" id="{46E43D71-B652-D83D-D673-B60F8A577D20}"/>
-              </a:ext>
-            </a:extLst>
-          </p:cNvPr>
-          <p:cNvPicPr>
-            <a:picLocks noChangeAspect="1"/>
-          </p:cNvPicPr>
-          <p:nvPr/>
-        </p:nvPicPr>
-        <p:blipFill>
-          <a:blip r:embed="rId6"/>
-          <a:srcRect l="2439"/>
-          <a:stretch>
-            <a:fillRect/>
-          </a:stretch>
-        </p:blipFill>
-        <p:spPr>
-          <a:xfrm>
-            <a:off x="18287" y="623635"/>
-            <a:ext cx="5598293" cy="9552492"/>
-          </a:xfrm>
-          <a:prstGeom prst="rect">
-            <a:avLst/>
-          </a:prstGeom>
-        </p:spPr>
-      </p:pic>
-      <p:sp>
-        <p:nvSpPr>
-          <p:cNvPr id="19" name="Google Shape;99;p1">
-            <a:extLst>
-              <a:ext uri="{FF2B5EF4-FFF2-40B4-BE49-F238E27FC236}">
-                <a16:creationId xmlns:a16="http://schemas.microsoft.com/office/drawing/2014/main" id="{C3947DFD-D14B-76E8-D7AB-11A77AD67DA7}"/>
-              </a:ext>
-            </a:extLst>
-          </p:cNvPr>
-          <p:cNvSpPr txBox="1"/>
-          <p:nvPr/>
-        </p:nvSpPr>
-        <p:spPr>
-          <a:xfrm>
-            <a:off x="9983268" y="5191389"/>
-            <a:ext cx="667265" cy="369291"/>
-          </a:xfrm>
-          <a:prstGeom prst="rect">
-            <a:avLst/>
-          </a:prstGeom>
-          <a:noFill/>
-          <a:ln>
-            <a:noFill/>
-          </a:ln>
-        </p:spPr>
-        <p:txBody>
-          <a:bodyPr spcFirstLastPara="1" wrap="square" lIns="91425" tIns="45700" rIns="91425" bIns="45700" anchor="t" anchorCtr="0">
-            <a:spAutoFit/>
-          </a:bodyPr>
-          <a:lstStyle/>
-          <a:p>
-            <a:pPr marL="0" marR="0" lvl="0" indent="0" algn="l" rtl="0">
-              <a:spcBef>
-                <a:spcPts val="0"/>
-              </a:spcBef>
-              <a:spcAft>
-                <a:spcPts val="0"/>
-              </a:spcAft>
-              <a:buNone/>
-            </a:pPr>
-            <a:r>
-              <a:rPr lang="en-US" sz="1800" dirty="0">
-                <a:solidFill>
-                  <a:schemeClr val="dk1"/>
-                </a:solidFill>
-              </a:rPr>
-              <a:t>f</a:t>
-            </a:r>
-            <a:endParaRPr dirty="0"/>
-          </a:p>
-        </p:txBody>
-      </p:sp>
-      <p:pic>
-        <p:nvPicPr>
-          <p:cNvPr id="21" name="Picture 20">
-            <a:extLst>
-              <a:ext uri="{FF2B5EF4-FFF2-40B4-BE49-F238E27FC236}">
-                <a16:creationId xmlns:a16="http://schemas.microsoft.com/office/drawing/2014/main" id="{4B13D539-4D7E-05E2-E210-EE8F66FE14E9}"/>
-              </a:ext>
-            </a:extLst>
-          </p:cNvPr>
-          <p:cNvPicPr>
-            <a:picLocks noChangeAspect="1"/>
-          </p:cNvPicPr>
-          <p:nvPr/>
-        </p:nvPicPr>
-        <p:blipFill>
-          <a:blip r:embed="rId7"/>
-          <a:stretch>
-            <a:fillRect/>
-          </a:stretch>
-        </p:blipFill>
-        <p:spPr>
-          <a:xfrm>
-            <a:off x="5887923" y="5084575"/>
-            <a:ext cx="3487483" cy="5508799"/>
-          </a:xfrm>
-          <a:prstGeom prst="rect">
-            <a:avLst/>
-          </a:prstGeom>
-        </p:spPr>
-      </p:pic>
-      <p:pic>
-        <p:nvPicPr>
-          <p:cNvPr id="29" name="Picture 28">
-            <a:extLst>
-              <a:ext uri="{FF2B5EF4-FFF2-40B4-BE49-F238E27FC236}">
-                <a16:creationId xmlns:a16="http://schemas.microsoft.com/office/drawing/2014/main" id="{A9E68AA6-9F4C-4AB3-E6A6-A7FAFC446A61}"/>
+                <a16:creationId xmlns:a16="http://schemas.microsoft.com/office/drawing/2014/main" id="{EAE79E3C-B0DE-A67D-5698-8BB0A7276A37}"/>
               </a:ext>
             </a:extLst>
           </p:cNvPr>
@@ -12259,151 +12195,8 @@
         </p:blipFill>
         <p:spPr>
           <a:xfrm>
-            <a:off x="15434363" y="5376034"/>
-            <a:ext cx="6808775" cy="5106581"/>
-          </a:xfrm>
-          <a:prstGeom prst="rect">
-            <a:avLst/>
-          </a:prstGeom>
-        </p:spPr>
-      </p:pic>
-      <p:sp>
-        <p:nvSpPr>
-          <p:cNvPr id="210" name="Google Shape;99;p1">
-            <a:extLst>
-              <a:ext uri="{FF2B5EF4-FFF2-40B4-BE49-F238E27FC236}">
-                <a16:creationId xmlns:a16="http://schemas.microsoft.com/office/drawing/2014/main" id="{E7A6191E-6CC9-9BE5-90F0-7FF4DB5C9A40}"/>
-              </a:ext>
-            </a:extLst>
-          </p:cNvPr>
-          <p:cNvSpPr txBox="1"/>
-          <p:nvPr/>
-        </p:nvSpPr>
-        <p:spPr>
-          <a:xfrm>
-            <a:off x="15429915" y="5192517"/>
-            <a:ext cx="667265" cy="369291"/>
-          </a:xfrm>
-          <a:prstGeom prst="rect">
-            <a:avLst/>
-          </a:prstGeom>
-          <a:noFill/>
-          <a:ln>
-            <a:noFill/>
-          </a:ln>
-        </p:spPr>
-        <p:txBody>
-          <a:bodyPr spcFirstLastPara="1" wrap="square" lIns="91425" tIns="45700" rIns="91425" bIns="45700" anchor="t" anchorCtr="0">
-            <a:spAutoFit/>
-          </a:bodyPr>
-          <a:lstStyle/>
-          <a:p>
-            <a:pPr marL="0" marR="0" lvl="0" indent="0" algn="l" rtl="0">
-              <a:spcBef>
-                <a:spcPts val="0"/>
-              </a:spcBef>
-              <a:spcAft>
-                <a:spcPts val="0"/>
-              </a:spcAft>
-              <a:buNone/>
-            </a:pPr>
-            <a:r>
-              <a:rPr lang="en-US" sz="1800" dirty="0">
-                <a:solidFill>
-                  <a:schemeClr val="dk1"/>
-                </a:solidFill>
-              </a:rPr>
-              <a:t>g</a:t>
-            </a:r>
-            <a:endParaRPr dirty="0"/>
-          </a:p>
-        </p:txBody>
-      </p:sp>
-      <p:pic>
-        <p:nvPicPr>
-          <p:cNvPr id="3" name="Picture 2">
-            <a:extLst>
-              <a:ext uri="{FF2B5EF4-FFF2-40B4-BE49-F238E27FC236}">
-                <a16:creationId xmlns:a16="http://schemas.microsoft.com/office/drawing/2014/main" id="{81A47AB0-0076-D55A-5ACA-FF469AB5DAAE}"/>
-              </a:ext>
-            </a:extLst>
-          </p:cNvPr>
-          <p:cNvPicPr>
-            <a:picLocks noChangeAspect="1"/>
-          </p:cNvPicPr>
-          <p:nvPr/>
-        </p:nvPicPr>
-        <p:blipFill>
-          <a:blip r:embed="rId9"/>
-          <a:stretch>
-            <a:fillRect/>
-          </a:stretch>
-        </p:blipFill>
-        <p:spPr>
-          <a:xfrm>
-            <a:off x="16603550" y="312348"/>
-            <a:ext cx="6081768" cy="4233049"/>
-          </a:xfrm>
-          <a:prstGeom prst="rect">
-            <a:avLst/>
-          </a:prstGeom>
-        </p:spPr>
-      </p:pic>
-      <p:pic>
-        <p:nvPicPr>
-          <p:cNvPr id="5" name="Picture 4">
-            <a:extLst>
-              <a:ext uri="{FF2B5EF4-FFF2-40B4-BE49-F238E27FC236}">
-                <a16:creationId xmlns:a16="http://schemas.microsoft.com/office/drawing/2014/main" id="{A929F67E-90AC-1C50-C317-E98D54BB47B7}"/>
-              </a:ext>
-            </a:extLst>
-          </p:cNvPr>
-          <p:cNvPicPr>
-            <a:picLocks noChangeAspect="1"/>
-          </p:cNvPicPr>
-          <p:nvPr/>
-        </p:nvPicPr>
-        <p:blipFill>
-          <a:blip r:embed="rId10"/>
-          <a:stretch>
-            <a:fillRect/>
-          </a:stretch>
-        </p:blipFill>
-        <p:spPr>
-          <a:xfrm>
-            <a:off x="10578847" y="4830348"/>
-            <a:ext cx="3565836" cy="2227126"/>
-          </a:xfrm>
-          <a:prstGeom prst="rect">
-            <a:avLst/>
-          </a:prstGeom>
-        </p:spPr>
-      </p:pic>
-      <p:pic>
-        <p:nvPicPr>
-          <p:cNvPr id="11" name="Picture 10">
-            <a:extLst>
-              <a:ext uri="{FF2B5EF4-FFF2-40B4-BE49-F238E27FC236}">
-                <a16:creationId xmlns:a16="http://schemas.microsoft.com/office/drawing/2014/main" id="{C15F1B63-0EBE-6350-B423-EED055010C67}"/>
-              </a:ext>
-            </a:extLst>
-          </p:cNvPr>
-          <p:cNvPicPr>
-            <a:picLocks noChangeAspect="1"/>
-          </p:cNvPicPr>
-          <p:nvPr/>
-        </p:nvPicPr>
-        <p:blipFill>
-          <a:blip r:embed="rId11"/>
-          <a:srcRect b="19547"/>
-          <a:stretch>
-            <a:fillRect/>
-          </a:stretch>
-        </p:blipFill>
-        <p:spPr>
-          <a:xfrm>
-            <a:off x="9600277" y="7201583"/>
-            <a:ext cx="5486400" cy="3525028"/>
+            <a:off x="2283676" y="2275851"/>
+            <a:ext cx="1999804" cy="1391909"/>
           </a:xfrm>
           <a:prstGeom prst="rect">
             <a:avLst/>

--- a/figures/Figure2_case1.pptx
+++ b/figures/Figure2_case1.pptx
@@ -253,7 +253,7 @@
       <p15:sldGuideLst xmlns:p15="http://schemas.microsoft.com/office/powerpoint/2012/main"/>
     </p:ext>
     <p:ext uri="GoogleSlidesCustomDataVersion2">
-      <go:slidesCustomData xmlns:go="http://customooxmlschemas.google.com/" xmlns:ahyp="http://schemas.microsoft.com/office/drawing/2018/hyperlinkcolor" xmlns:p15="http://schemas.microsoft.com/office/powerpoint/2012/main" xmlns:p14="http://schemas.microsoft.com/office/powerpoint/2010/main" xmlns:com="http://schemas.openxmlformats.org/drawingml/2006/compatibility" xmlns:pvml="urn:schemas-microsoft-com:office:powerpoint" xmlns:v="urn:schemas-microsoft-com:vml" xmlns:o="urn:schemas-microsoft-com:office:office" xmlns:dgm="http://schemas.openxmlformats.org/drawingml/2006/diagram" xmlns:c="http://schemas.openxmlformats.org/drawingml/2006/chart" xmlns:mv="urn:schemas-microsoft-com:mac:vml" xmlns:mc="http://schemas.openxmlformats.org/markup-compatibility/2006" xmlns="" r:id="rId8" roundtripDataSignature="AMtx7mgIxyl4bEzcNayDQ1Sc4BGs65vqzg=="/>
+      <go:slidesCustomData xmlns="" xmlns:mc="http://schemas.openxmlformats.org/markup-compatibility/2006" xmlns:mv="urn:schemas-microsoft-com:mac:vml" xmlns:c="http://schemas.openxmlformats.org/drawingml/2006/chart" xmlns:dgm="http://schemas.openxmlformats.org/drawingml/2006/diagram" xmlns:o="urn:schemas-microsoft-com:office:office" xmlns:v="urn:schemas-microsoft-com:vml" xmlns:pvml="urn:schemas-microsoft-com:office:powerpoint" xmlns:com="http://schemas.openxmlformats.org/drawingml/2006/compatibility" xmlns:p14="http://schemas.microsoft.com/office/powerpoint/2010/main" xmlns:p15="http://schemas.microsoft.com/office/powerpoint/2012/main" xmlns:ahyp="http://schemas.microsoft.com/office/drawing/2018/hyperlinkcolor" xmlns:go="http://customooxmlschemas.google.com/" r:id="rId8" roundtripDataSignature="AMtx7mgIxyl4bEzcNayDQ1Sc4BGs65vqzg=="/>
     </p:ext>
   </p:extLst>
 </p:presentation>
@@ -12203,6 +12203,89 @@
           </a:prstGeom>
         </p:spPr>
       </p:pic>
+      <p:sp>
+        <p:nvSpPr>
+          <p:cNvPr id="2" name="TextBox 1">
+            <a:extLst>
+              <a:ext uri="{FF2B5EF4-FFF2-40B4-BE49-F238E27FC236}">
+                <a16:creationId xmlns:a16="http://schemas.microsoft.com/office/drawing/2014/main" id="{D4D162CA-1078-97C5-6F83-1ED4F28E2186}"/>
+              </a:ext>
+            </a:extLst>
+          </p:cNvPr>
+          <p:cNvSpPr txBox="1"/>
+          <p:nvPr/>
+        </p:nvSpPr>
+        <p:spPr>
+          <a:xfrm>
+            <a:off x="0" y="4121834"/>
+            <a:ext cx="6858000" cy="2516073"/>
+          </a:xfrm>
+          <a:prstGeom prst="rect">
+            <a:avLst/>
+          </a:prstGeom>
+          <a:noFill/>
+        </p:spPr>
+        <p:txBody>
+          <a:bodyPr wrap="square" rtlCol="0">
+            <a:spAutoFit/>
+          </a:bodyPr>
+          <a:lstStyle/>
+          <a:p>
+            <a:r>
+              <a:rPr lang="en-CA" sz="1050" b="1" dirty="0"/>
+              <a:t>Figure 2</a:t>
+            </a:r>
+            <a:r>
+              <a:rPr lang="en-CA" sz="1050" dirty="0"/>
+              <a:t>. Transcriptomic modeling of intrinsic PDX growth kinetics.</a:t>
+            </a:r>
+          </a:p>
+          <a:p>
+            <a:r>
+              <a:rPr lang="en-CA" sz="1050" dirty="0"/>
+              <a:t>(a) Case study one workflow: control-arm longitudinal tumour-volume curves and matched RNA-seq from breast and lung PDX cohorts are used to estimate model-level doubling time, modeled by </a:t>
+            </a:r>
+            <a:r>
+              <a:rPr lang="en-CA" sz="1050" dirty="0" err="1"/>
+              <a:t>ElasticNet</a:t>
+            </a:r>
+            <a:r>
+              <a:rPr lang="en-CA" sz="1050" dirty="0"/>
+              <a:t>, Random Forest, and Lassoed Forest classifiers under repeated cross-validation. (b) Representative doubling-time estimation for one control-arm mouse (REF001.H2O.m9): raw tumour-volume trajectory (top; points within the 35-day fitting window in blue, excluded points in gray) and the corresponding exponential-growth fit (ln(tumour volume) vs. time, bottom), with goodness-of-fit (R² = 0.91) and doubling time (DT = 20.7 days) annotated. (c) Distribution of estimated doubling times across breast (n = 75) and lung (n = 27) PDX models (</a:t>
+            </a:r>
+            <a:r>
+              <a:rPr lang="en-CA" sz="1050" dirty="0" err="1"/>
+              <a:t>intetrated</a:t>
+            </a:r>
+            <a:r>
+              <a:rPr lang="en-CA" sz="1050" dirty="0"/>
+              <a:t> modeling datasets shown in a), with the fastest- and slowest-growing tertiles used to define the classification task highlighted (breast: n = 25/25; lung: n = 9/9). (d) Cross-validated AUROC of </a:t>
+            </a:r>
+            <a:r>
+              <a:rPr lang="en-CA" sz="1050" dirty="0" err="1"/>
+              <a:t>ElasticNet</a:t>
+            </a:r>
+            <a:r>
+              <a:rPr lang="en-CA" sz="1050" dirty="0"/>
+              <a:t>, Random Forest, and Lassoed Forest classifiers distinguishing fast- from slow-growing models, breast and lung; dashed line, chance performance. (e</a:t>
+            </a:r>
+            <a:r>
+              <a:rPr lang="en-CA" sz="1050"/>
+              <a:t>) Cross-cohort </a:t>
+            </a:r>
+            <a:r>
+              <a:rPr lang="en-CA" sz="1050" dirty="0"/>
+              <a:t>comparison of Hallmark gene-set enrichment (GSEA NES) associated with fast- vs. slow-growing tumours in the breast and lung cohorts.</a:t>
+            </a:r>
+          </a:p>
+          <a:p>
+            <a:br>
+              <a:rPr lang="en-CA" sz="1050" dirty="0"/>
+            </a:br>
+            <a:endParaRPr lang="en-US" sz="1050" dirty="0"/>
+          </a:p>
+        </p:txBody>
+      </p:sp>
     </p:spTree>
   </p:cSld>
   <p:clrMapOvr>
